--- a/docs/proyectos/personas-mayores/PPT_Sesion_5_COMBINADA.pptx
+++ b/docs/proyectos/personas-mayores/PPT_Sesion_5_COMBINADA.pptx
@@ -3636,7 +3636,91 @@
       </p:grpSpPr>
       <p:sp>
         <p:nvSpPr>
-          <p:cNvPr id="2" name="Text 0"/>
+          <p:cNvPr id="2" name="Shape 0"/>
+          <p:cNvSpPr/>
+          <p:nvPr/>
+        </p:nvSpPr>
+        <p:spPr>
+          <a:xfrm>
+            <a:off x="9619488" y="182880"/>
+            <a:ext cx="2011680" cy="859536"/>
+          </a:xfrm>
+          <a:prstGeom prst="rect">
+            <a:avLst/>
+          </a:prstGeom>
+          <a:solidFill>
+            <a:srgbClr val="FFFFFF"/>
+          </a:solidFill>
+          <a:ln/>
+        </p:spPr>
+      </p:sp>
+      <p:sp>
+        <p:nvSpPr>
+          <p:cNvPr id="3" name="Shape 1"/>
+          <p:cNvSpPr/>
+          <p:nvPr/>
+        </p:nvSpPr>
+        <p:spPr>
+          <a:xfrm>
+            <a:off x="9710928" y="274320"/>
+            <a:ext cx="1828800" cy="676656"/>
+          </a:xfrm>
+          <a:prstGeom prst="rect">
+            <a:avLst/>
+          </a:prstGeom>
+          <a:solidFill>
+            <a:srgbClr val="F1F4F6"/>
+          </a:solidFill>
+          <a:ln w="12700">
+            <a:solidFill>
+              <a:srgbClr val="B6C6D0"/>
+            </a:solidFill>
+            <a:prstDash val="dash"/>
+          </a:ln>
+        </p:spPr>
+      </p:sp>
+      <p:sp>
+        <p:nvSpPr>
+          <p:cNvPr id="4" name="Text 2"/>
+          <p:cNvSpPr txBox="1"/>
+          <p:nvPr/>
+        </p:nvSpPr>
+        <p:spPr>
+          <a:xfrm>
+            <a:off x="9710928" y="274320"/>
+            <a:ext cx="1828800" cy="676656"/>
+          </a:xfrm>
+          <a:prstGeom prst="rect">
+            <a:avLst/>
+          </a:prstGeom>
+          <a:noFill/>
+          <a:ln/>
+        </p:spPr>
+        <p:txBody>
+          <a:bodyPr wrap="square" lIns="0" tIns="0" rIns="0" bIns="0" rtlCol="0" anchor="ctr"/>
+          <a:lstStyle/>
+          <a:p>
+            <a:pPr algn="ctr" indent="0" marL="0">
+              <a:buNone/>
+            </a:pPr>
+            <a:r>
+              <a:rPr lang="en-US" sz="1200" b="1" spc="200" kern="0" dirty="0">
+                <a:solidFill>
+                  <a:srgbClr val="8FA3B0"/>
+                </a:solidFill>
+                <a:latin typeface="Arial" pitchFamily="34" charset="0"/>
+                <a:ea typeface="Arial" pitchFamily="34" charset="-122"/>
+                <a:cs typeface="Arial" pitchFamily="34" charset="-120"/>
+              </a:rPr>
+              <a:t>LOGO</a:t>
+            </a:r>
+            <a:endParaRPr lang="en-US" sz="1200" dirty="0"/>
+          </a:p>
+        </p:txBody>
+      </p:sp>
+      <p:sp>
+        <p:nvSpPr>
+          <p:cNvPr id="5" name="Text 3"/>
           <p:cNvSpPr txBox="1"/>
           <p:nvPr/>
         </p:nvSpPr>
@@ -3675,7 +3759,7 @@
       </p:sp>
       <p:sp>
         <p:nvSpPr>
-          <p:cNvPr id="3" name="Text 1"/>
+          <p:cNvPr id="6" name="Text 4"/>
           <p:cNvSpPr txBox="1"/>
           <p:nvPr/>
         </p:nvSpPr>
@@ -3714,7 +3798,7 @@
       </p:sp>
       <p:sp>
         <p:nvSpPr>
-          <p:cNvPr id="4" name="Shape 2"/>
+          <p:cNvPr id="7" name="Shape 5"/>
           <p:cNvSpPr/>
           <p:nvPr/>
         </p:nvSpPr>
@@ -3734,7 +3818,7 @@
       </p:sp>
       <p:sp>
         <p:nvSpPr>
-          <p:cNvPr id="5" name="Text 3"/>
+          <p:cNvPr id="8" name="Text 6"/>
           <p:cNvSpPr txBox="1"/>
           <p:nvPr/>
         </p:nvSpPr>
@@ -3790,7 +3874,7 @@
       </p:sp>
       <p:sp>
         <p:nvSpPr>
-          <p:cNvPr id="6" name="Shape 4"/>
+          <p:cNvPr id="9" name="Shape 7"/>
           <p:cNvSpPr/>
           <p:nvPr/>
         </p:nvSpPr>
@@ -3810,7 +3894,7 @@
       </p:sp>
       <p:sp>
         <p:nvSpPr>
-          <p:cNvPr id="7" name="Shape 5"/>
+          <p:cNvPr id="10" name="Shape 8"/>
           <p:cNvSpPr/>
           <p:nvPr/>
         </p:nvSpPr>
@@ -3830,7 +3914,7 @@
       </p:sp>
       <p:sp>
         <p:nvSpPr>
-          <p:cNvPr id="8" name="Text 6"/>
+          <p:cNvPr id="11" name="Text 9"/>
           <p:cNvSpPr txBox="1"/>
           <p:nvPr/>
         </p:nvSpPr>
@@ -3869,7 +3953,7 @@
       </p:sp>
       <p:sp>
         <p:nvSpPr>
-          <p:cNvPr id="9" name="Text 7"/>
+          <p:cNvPr id="12" name="Text 10"/>
           <p:cNvSpPr txBox="1"/>
           <p:nvPr/>
         </p:nvSpPr>
@@ -3925,7 +4009,7 @@
       </p:sp>
       <p:sp>
         <p:nvSpPr>
-          <p:cNvPr id="10" name="Text 8"/>
+          <p:cNvPr id="13" name="Text 11"/>
           <p:cNvSpPr txBox="1"/>
           <p:nvPr/>
         </p:nvSpPr>
@@ -3964,7 +4048,7 @@
       </p:sp>
       <p:sp>
         <p:nvSpPr>
-          <p:cNvPr id="11" name="Text 9"/>
+          <p:cNvPr id="14" name="Text 12"/>
           <p:cNvSpPr txBox="1"/>
           <p:nvPr/>
         </p:nvSpPr>
@@ -4074,7 +4158,91 @@
       </p:sp>
       <p:sp>
         <p:nvSpPr>
-          <p:cNvPr id="3" name="Text 1"/>
+          <p:cNvPr id="3" name="Shape 1"/>
+          <p:cNvSpPr/>
+          <p:nvPr/>
+        </p:nvSpPr>
+        <p:spPr>
+          <a:xfrm>
+            <a:off x="9619488" y="182880"/>
+            <a:ext cx="2011680" cy="859536"/>
+          </a:xfrm>
+          <a:prstGeom prst="rect">
+            <a:avLst/>
+          </a:prstGeom>
+          <a:solidFill>
+            <a:srgbClr val="FFFFFF"/>
+          </a:solidFill>
+          <a:ln/>
+        </p:spPr>
+      </p:sp>
+      <p:sp>
+        <p:nvSpPr>
+          <p:cNvPr id="4" name="Shape 2"/>
+          <p:cNvSpPr/>
+          <p:nvPr/>
+        </p:nvSpPr>
+        <p:spPr>
+          <a:xfrm>
+            <a:off x="9710928" y="274320"/>
+            <a:ext cx="1828800" cy="676656"/>
+          </a:xfrm>
+          <a:prstGeom prst="rect">
+            <a:avLst/>
+          </a:prstGeom>
+          <a:solidFill>
+            <a:srgbClr val="F1F4F6"/>
+          </a:solidFill>
+          <a:ln w="12700">
+            <a:solidFill>
+              <a:srgbClr val="B6C6D0"/>
+            </a:solidFill>
+            <a:prstDash val="dash"/>
+          </a:ln>
+        </p:spPr>
+      </p:sp>
+      <p:sp>
+        <p:nvSpPr>
+          <p:cNvPr id="5" name="Text 3"/>
+          <p:cNvSpPr txBox="1"/>
+          <p:nvPr/>
+        </p:nvSpPr>
+        <p:spPr>
+          <a:xfrm>
+            <a:off x="9710928" y="274320"/>
+            <a:ext cx="1828800" cy="676656"/>
+          </a:xfrm>
+          <a:prstGeom prst="rect">
+            <a:avLst/>
+          </a:prstGeom>
+          <a:noFill/>
+          <a:ln/>
+        </p:spPr>
+        <p:txBody>
+          <a:bodyPr wrap="square" lIns="0" tIns="0" rIns="0" bIns="0" rtlCol="0" anchor="ctr"/>
+          <a:lstStyle/>
+          <a:p>
+            <a:pPr algn="ctr" indent="0" marL="0">
+              <a:buNone/>
+            </a:pPr>
+            <a:r>
+              <a:rPr lang="en-US" sz="1200" b="1" spc="200" kern="0" dirty="0">
+                <a:solidFill>
+                  <a:srgbClr val="8FA3B0"/>
+                </a:solidFill>
+                <a:latin typeface="Arial" pitchFamily="34" charset="0"/>
+                <a:ea typeface="Arial" pitchFamily="34" charset="-122"/>
+                <a:cs typeface="Arial" pitchFamily="34" charset="-120"/>
+              </a:rPr>
+              <a:t>LOGO</a:t>
+            </a:r>
+            <a:endParaRPr lang="en-US" sz="1200" dirty="0"/>
+          </a:p>
+        </p:txBody>
+      </p:sp>
+      <p:sp>
+        <p:nvSpPr>
+          <p:cNvPr id="6" name="Text 4"/>
           <p:cNvSpPr txBox="1"/>
           <p:nvPr/>
         </p:nvSpPr>
@@ -4113,7 +4281,7 @@
       </p:sp>
       <p:sp>
         <p:nvSpPr>
-          <p:cNvPr id="4" name="Shape 2"/>
+          <p:cNvPr id="7" name="Shape 5"/>
           <p:cNvSpPr/>
           <p:nvPr/>
         </p:nvSpPr>
@@ -4133,7 +4301,7 @@
       </p:sp>
       <p:pic>
         <p:nvPicPr>
-          <p:cNvPr id="5" name="Image 0" descr="preencoded.png">    </p:cNvPr>
+          <p:cNvPr id="8" name="Image 0" descr="preencoded.png">    </p:cNvPr>
           <p:cNvPicPr>
             <a:picLocks noChangeAspect="1"/>
           </p:cNvPicPr>
@@ -4157,7 +4325,7 @@
       </p:pic>
       <p:sp>
         <p:nvSpPr>
-          <p:cNvPr id="6" name="Text 3"/>
+          <p:cNvPr id="9" name="Text 6"/>
           <p:cNvSpPr txBox="1"/>
           <p:nvPr/>
         </p:nvSpPr>
@@ -4219,7 +4387,7 @@
       </p:sp>
       <p:sp>
         <p:nvSpPr>
-          <p:cNvPr id="7" name="Text 4"/>
+          <p:cNvPr id="10" name="Text 7"/>
           <p:cNvSpPr txBox="1"/>
           <p:nvPr/>
         </p:nvSpPr>
@@ -4352,7 +4520,91 @@
       </p:sp>
       <p:sp>
         <p:nvSpPr>
-          <p:cNvPr id="3" name="Text 1"/>
+          <p:cNvPr id="3" name="Shape 1"/>
+          <p:cNvSpPr/>
+          <p:nvPr/>
+        </p:nvSpPr>
+        <p:spPr>
+          <a:xfrm>
+            <a:off x="9619488" y="182880"/>
+            <a:ext cx="2011680" cy="859536"/>
+          </a:xfrm>
+          <a:prstGeom prst="rect">
+            <a:avLst/>
+          </a:prstGeom>
+          <a:solidFill>
+            <a:srgbClr val="FFFFFF"/>
+          </a:solidFill>
+          <a:ln/>
+        </p:spPr>
+      </p:sp>
+      <p:sp>
+        <p:nvSpPr>
+          <p:cNvPr id="4" name="Shape 2"/>
+          <p:cNvSpPr/>
+          <p:nvPr/>
+        </p:nvSpPr>
+        <p:spPr>
+          <a:xfrm>
+            <a:off x="9710928" y="274320"/>
+            <a:ext cx="1828800" cy="676656"/>
+          </a:xfrm>
+          <a:prstGeom prst="rect">
+            <a:avLst/>
+          </a:prstGeom>
+          <a:solidFill>
+            <a:srgbClr val="F1F4F6"/>
+          </a:solidFill>
+          <a:ln w="12700">
+            <a:solidFill>
+              <a:srgbClr val="B6C6D0"/>
+            </a:solidFill>
+            <a:prstDash val="dash"/>
+          </a:ln>
+        </p:spPr>
+      </p:sp>
+      <p:sp>
+        <p:nvSpPr>
+          <p:cNvPr id="5" name="Text 3"/>
+          <p:cNvSpPr txBox="1"/>
+          <p:nvPr/>
+        </p:nvSpPr>
+        <p:spPr>
+          <a:xfrm>
+            <a:off x="9710928" y="274320"/>
+            <a:ext cx="1828800" cy="676656"/>
+          </a:xfrm>
+          <a:prstGeom prst="rect">
+            <a:avLst/>
+          </a:prstGeom>
+          <a:noFill/>
+          <a:ln/>
+        </p:spPr>
+        <p:txBody>
+          <a:bodyPr wrap="square" lIns="0" tIns="0" rIns="0" bIns="0" rtlCol="0" anchor="ctr"/>
+          <a:lstStyle/>
+          <a:p>
+            <a:pPr algn="ctr" indent="0" marL="0">
+              <a:buNone/>
+            </a:pPr>
+            <a:r>
+              <a:rPr lang="en-US" sz="1200" b="1" spc="200" kern="0" dirty="0">
+                <a:solidFill>
+                  <a:srgbClr val="8FA3B0"/>
+                </a:solidFill>
+                <a:latin typeface="Arial" pitchFamily="34" charset="0"/>
+                <a:ea typeface="Arial" pitchFamily="34" charset="-122"/>
+                <a:cs typeface="Arial" pitchFamily="34" charset="-120"/>
+              </a:rPr>
+              <a:t>LOGO</a:t>
+            </a:r>
+            <a:endParaRPr lang="en-US" sz="1200" dirty="0"/>
+          </a:p>
+        </p:txBody>
+      </p:sp>
+      <p:sp>
+        <p:nvSpPr>
+          <p:cNvPr id="6" name="Text 4"/>
           <p:cNvSpPr txBox="1"/>
           <p:nvPr/>
         </p:nvSpPr>
@@ -4391,7 +4643,7 @@
       </p:sp>
       <p:sp>
         <p:nvSpPr>
-          <p:cNvPr id="4" name="Shape 2"/>
+          <p:cNvPr id="7" name="Shape 5"/>
           <p:cNvSpPr/>
           <p:nvPr/>
         </p:nvSpPr>
@@ -4411,7 +4663,7 @@
       </p:sp>
       <p:pic>
         <p:nvPicPr>
-          <p:cNvPr id="5" name="Image 0" descr="preencoded.png">    </p:cNvPr>
+          <p:cNvPr id="8" name="Image 0" descr="preencoded.png">    </p:cNvPr>
           <p:cNvPicPr>
             <a:picLocks noChangeAspect="1"/>
           </p:cNvPicPr>
@@ -4435,7 +4687,7 @@
       </p:pic>
       <p:sp>
         <p:nvSpPr>
-          <p:cNvPr id="6" name="Text 3"/>
+          <p:cNvPr id="9" name="Text 6"/>
           <p:cNvSpPr txBox="1"/>
           <p:nvPr/>
         </p:nvSpPr>
@@ -4474,7 +4726,7 @@
       </p:sp>
       <p:sp>
         <p:nvSpPr>
-          <p:cNvPr id="7" name="Text 4"/>
+          <p:cNvPr id="10" name="Text 7"/>
           <p:cNvSpPr txBox="1"/>
           <p:nvPr/>
         </p:nvSpPr>
@@ -4590,6 +4842,90 @@
         </p:nvSpPr>
         <p:spPr>
           <a:xfrm>
+            <a:off x="9619488" y="182880"/>
+            <a:ext cx="2011680" cy="859536"/>
+          </a:xfrm>
+          <a:prstGeom prst="rect">
+            <a:avLst/>
+          </a:prstGeom>
+          <a:solidFill>
+            <a:srgbClr val="FFFFFF"/>
+          </a:solidFill>
+          <a:ln/>
+        </p:spPr>
+      </p:sp>
+      <p:sp>
+        <p:nvSpPr>
+          <p:cNvPr id="4" name="Shape 2"/>
+          <p:cNvSpPr/>
+          <p:nvPr/>
+        </p:nvSpPr>
+        <p:spPr>
+          <a:xfrm>
+            <a:off x="9710928" y="274320"/>
+            <a:ext cx="1828800" cy="676656"/>
+          </a:xfrm>
+          <a:prstGeom prst="rect">
+            <a:avLst/>
+          </a:prstGeom>
+          <a:solidFill>
+            <a:srgbClr val="F1F4F6"/>
+          </a:solidFill>
+          <a:ln w="12700">
+            <a:solidFill>
+              <a:srgbClr val="B6C6D0"/>
+            </a:solidFill>
+            <a:prstDash val="dash"/>
+          </a:ln>
+        </p:spPr>
+      </p:sp>
+      <p:sp>
+        <p:nvSpPr>
+          <p:cNvPr id="5" name="Text 3"/>
+          <p:cNvSpPr txBox="1"/>
+          <p:nvPr/>
+        </p:nvSpPr>
+        <p:spPr>
+          <a:xfrm>
+            <a:off x="9710928" y="274320"/>
+            <a:ext cx="1828800" cy="676656"/>
+          </a:xfrm>
+          <a:prstGeom prst="rect">
+            <a:avLst/>
+          </a:prstGeom>
+          <a:noFill/>
+          <a:ln/>
+        </p:spPr>
+        <p:txBody>
+          <a:bodyPr wrap="square" lIns="0" tIns="0" rIns="0" bIns="0" rtlCol="0" anchor="ctr"/>
+          <a:lstStyle/>
+          <a:p>
+            <a:pPr algn="ctr" indent="0" marL="0">
+              <a:buNone/>
+            </a:pPr>
+            <a:r>
+              <a:rPr lang="en-US" sz="1200" b="1" spc="200" kern="0" dirty="0">
+                <a:solidFill>
+                  <a:srgbClr val="8FA3B0"/>
+                </a:solidFill>
+                <a:latin typeface="Arial" pitchFamily="34" charset="0"/>
+                <a:ea typeface="Arial" pitchFamily="34" charset="-122"/>
+                <a:cs typeface="Arial" pitchFamily="34" charset="-120"/>
+              </a:rPr>
+              <a:t>LOGO</a:t>
+            </a:r>
+            <a:endParaRPr lang="en-US" sz="1200" dirty="0"/>
+          </a:p>
+        </p:txBody>
+      </p:sp>
+      <p:sp>
+        <p:nvSpPr>
+          <p:cNvPr id="6" name="Shape 4"/>
+          <p:cNvSpPr/>
+          <p:nvPr/>
+        </p:nvSpPr>
+        <p:spPr>
+          <a:xfrm>
             <a:off x="566928" y="685800"/>
             <a:ext cx="1188720" cy="1188720"/>
           </a:xfrm>
@@ -4604,7 +4940,7 @@
       </p:sp>
       <p:pic>
         <p:nvPicPr>
-          <p:cNvPr id="4" name="Image 0" descr="preencoded.png">    </p:cNvPr>
+          <p:cNvPr id="7" name="Image 0" descr="preencoded.png">    </p:cNvPr>
           <p:cNvPicPr>
             <a:picLocks noChangeAspect="1"/>
           </p:cNvPicPr>
@@ -4628,7 +4964,7 @@
       </p:pic>
       <p:sp>
         <p:nvSpPr>
-          <p:cNvPr id="5" name="Text 2"/>
+          <p:cNvPr id="8" name="Text 5"/>
           <p:cNvSpPr txBox="1"/>
           <p:nvPr/>
         </p:nvSpPr>
@@ -4667,7 +5003,7 @@
       </p:sp>
       <p:sp>
         <p:nvSpPr>
-          <p:cNvPr id="6" name="Shape 3"/>
+          <p:cNvPr id="9" name="Shape 6"/>
           <p:cNvSpPr/>
           <p:nvPr/>
         </p:nvSpPr>
@@ -4687,7 +5023,7 @@
       </p:sp>
       <p:sp>
         <p:nvSpPr>
-          <p:cNvPr id="7" name="Shape 4"/>
+          <p:cNvPr id="10" name="Shape 7"/>
           <p:cNvSpPr/>
           <p:nvPr/>
         </p:nvSpPr>
@@ -4707,7 +5043,7 @@
       </p:sp>
       <p:sp>
         <p:nvSpPr>
-          <p:cNvPr id="8" name="Shape 5"/>
+          <p:cNvPr id="11" name="Shape 8"/>
           <p:cNvSpPr/>
           <p:nvPr/>
         </p:nvSpPr>
@@ -4727,7 +5063,7 @@
       </p:sp>
       <p:pic>
         <p:nvPicPr>
-          <p:cNvPr id="9" name="Image 1" descr="preencoded.png">    </p:cNvPr>
+          <p:cNvPr id="12" name="Image 1" descr="preencoded.png">    </p:cNvPr>
           <p:cNvPicPr>
             <a:picLocks noChangeAspect="1"/>
           </p:cNvPicPr>
@@ -4751,7 +5087,7 @@
       </p:pic>
       <p:sp>
         <p:nvSpPr>
-          <p:cNvPr id="10" name="Text 6"/>
+          <p:cNvPr id="13" name="Text 9"/>
           <p:cNvSpPr txBox="1"/>
           <p:nvPr/>
         </p:nvSpPr>
@@ -4790,7 +5126,7 @@
       </p:sp>
       <p:sp>
         <p:nvSpPr>
-          <p:cNvPr id="11" name="Text 7"/>
+          <p:cNvPr id="14" name="Text 10"/>
           <p:cNvSpPr txBox="1"/>
           <p:nvPr/>
         </p:nvSpPr>
@@ -4852,7 +5188,7 @@
       </p:sp>
       <p:sp>
         <p:nvSpPr>
-          <p:cNvPr id="12" name="Shape 8"/>
+          <p:cNvPr id="15" name="Shape 11"/>
           <p:cNvSpPr/>
           <p:nvPr/>
         </p:nvSpPr>
@@ -4872,7 +5208,7 @@
       </p:sp>
       <p:sp>
         <p:nvSpPr>
-          <p:cNvPr id="13" name="Shape 9"/>
+          <p:cNvPr id="16" name="Shape 12"/>
           <p:cNvSpPr/>
           <p:nvPr/>
         </p:nvSpPr>
@@ -4892,7 +5228,7 @@
       </p:sp>
       <p:sp>
         <p:nvSpPr>
-          <p:cNvPr id="14" name="Shape 10"/>
+          <p:cNvPr id="17" name="Shape 13"/>
           <p:cNvSpPr/>
           <p:nvPr/>
         </p:nvSpPr>
@@ -4912,7 +5248,7 @@
       </p:sp>
       <p:pic>
         <p:nvPicPr>
-          <p:cNvPr id="15" name="Image 2" descr="preencoded.png">    </p:cNvPr>
+          <p:cNvPr id="18" name="Image 2" descr="preencoded.png">    </p:cNvPr>
           <p:cNvPicPr>
             <a:picLocks noChangeAspect="1"/>
           </p:cNvPicPr>
@@ -4936,7 +5272,7 @@
       </p:pic>
       <p:sp>
         <p:nvSpPr>
-          <p:cNvPr id="16" name="Text 11"/>
+          <p:cNvPr id="19" name="Text 14"/>
           <p:cNvSpPr txBox="1"/>
           <p:nvPr/>
         </p:nvSpPr>
@@ -4975,7 +5311,7 @@
       </p:sp>
       <p:sp>
         <p:nvSpPr>
-          <p:cNvPr id="17" name="Text 12"/>
+          <p:cNvPr id="20" name="Text 15"/>
           <p:cNvSpPr txBox="1"/>
           <p:nvPr/>
         </p:nvSpPr>
@@ -5037,7 +5373,7 @@
       </p:sp>
       <p:sp>
         <p:nvSpPr>
-          <p:cNvPr id="18" name="Shape 13"/>
+          <p:cNvPr id="21" name="Shape 16"/>
           <p:cNvSpPr/>
           <p:nvPr/>
         </p:nvSpPr>
@@ -5057,7 +5393,7 @@
       </p:sp>
       <p:sp>
         <p:nvSpPr>
-          <p:cNvPr id="19" name="Shape 14"/>
+          <p:cNvPr id="22" name="Shape 17"/>
           <p:cNvSpPr/>
           <p:nvPr/>
         </p:nvSpPr>
@@ -5077,7 +5413,7 @@
       </p:sp>
       <p:sp>
         <p:nvSpPr>
-          <p:cNvPr id="20" name="Shape 15"/>
+          <p:cNvPr id="23" name="Shape 18"/>
           <p:cNvSpPr/>
           <p:nvPr/>
         </p:nvSpPr>
@@ -5097,7 +5433,7 @@
       </p:sp>
       <p:pic>
         <p:nvPicPr>
-          <p:cNvPr id="21" name="Image 3" descr="preencoded.png">    </p:cNvPr>
+          <p:cNvPr id="24" name="Image 3" descr="preencoded.png">    </p:cNvPr>
           <p:cNvPicPr>
             <a:picLocks noChangeAspect="1"/>
           </p:cNvPicPr>
@@ -5121,7 +5457,7 @@
       </p:pic>
       <p:sp>
         <p:nvSpPr>
-          <p:cNvPr id="22" name="Text 16"/>
+          <p:cNvPr id="25" name="Text 19"/>
           <p:cNvSpPr txBox="1"/>
           <p:nvPr/>
         </p:nvSpPr>
@@ -5160,7 +5496,7 @@
       </p:sp>
       <p:sp>
         <p:nvSpPr>
-          <p:cNvPr id="23" name="Text 17"/>
+          <p:cNvPr id="26" name="Text 20"/>
           <p:cNvSpPr txBox="1"/>
           <p:nvPr/>
         </p:nvSpPr>
@@ -5358,6 +5694,90 @@
         </p:nvSpPr>
         <p:spPr>
           <a:xfrm>
+            <a:off x="9619488" y="182880"/>
+            <a:ext cx="2011680" cy="859536"/>
+          </a:xfrm>
+          <a:prstGeom prst="rect">
+            <a:avLst/>
+          </a:prstGeom>
+          <a:solidFill>
+            <a:srgbClr val="FFFFFF"/>
+          </a:solidFill>
+          <a:ln/>
+        </p:spPr>
+      </p:sp>
+      <p:sp>
+        <p:nvSpPr>
+          <p:cNvPr id="6" name="Shape 4"/>
+          <p:cNvSpPr/>
+          <p:nvPr/>
+        </p:nvSpPr>
+        <p:spPr>
+          <a:xfrm>
+            <a:off x="9710928" y="274320"/>
+            <a:ext cx="1828800" cy="676656"/>
+          </a:xfrm>
+          <a:prstGeom prst="rect">
+            <a:avLst/>
+          </a:prstGeom>
+          <a:solidFill>
+            <a:srgbClr val="F1F4F6"/>
+          </a:solidFill>
+          <a:ln w="12700">
+            <a:solidFill>
+              <a:srgbClr val="B6C6D0"/>
+            </a:solidFill>
+            <a:prstDash val="dash"/>
+          </a:ln>
+        </p:spPr>
+      </p:sp>
+      <p:sp>
+        <p:nvSpPr>
+          <p:cNvPr id="7" name="Text 5"/>
+          <p:cNvSpPr txBox="1"/>
+          <p:nvPr/>
+        </p:nvSpPr>
+        <p:spPr>
+          <a:xfrm>
+            <a:off x="9710928" y="274320"/>
+            <a:ext cx="1828800" cy="676656"/>
+          </a:xfrm>
+          <a:prstGeom prst="rect">
+            <a:avLst/>
+          </a:prstGeom>
+          <a:noFill/>
+          <a:ln/>
+        </p:spPr>
+        <p:txBody>
+          <a:bodyPr wrap="square" lIns="0" tIns="0" rIns="0" bIns="0" rtlCol="0" anchor="ctr"/>
+          <a:lstStyle/>
+          <a:p>
+            <a:pPr algn="ctr" indent="0" marL="0">
+              <a:buNone/>
+            </a:pPr>
+            <a:r>
+              <a:rPr lang="en-US" sz="1200" b="1" spc="200" kern="0" dirty="0">
+                <a:solidFill>
+                  <a:srgbClr val="8FA3B0"/>
+                </a:solidFill>
+                <a:latin typeface="Arial" pitchFamily="34" charset="0"/>
+                <a:ea typeface="Arial" pitchFamily="34" charset="-122"/>
+                <a:cs typeface="Arial" pitchFamily="34" charset="-120"/>
+              </a:rPr>
+              <a:t>LOGO</a:t>
+            </a:r>
+            <a:endParaRPr lang="en-US" sz="1200" dirty="0"/>
+          </a:p>
+        </p:txBody>
+      </p:sp>
+      <p:sp>
+        <p:nvSpPr>
+          <p:cNvPr id="8" name="Shape 6"/>
+          <p:cNvSpPr/>
+          <p:nvPr/>
+        </p:nvSpPr>
+        <p:spPr>
+          <a:xfrm>
             <a:off x="9646920" y="1143000"/>
             <a:ext cx="1920240" cy="1920240"/>
           </a:xfrm>
@@ -5372,7 +5792,7 @@
       </p:sp>
       <p:pic>
         <p:nvPicPr>
-          <p:cNvPr id="6" name="Image 0" descr="preencoded.png">    </p:cNvPr>
+          <p:cNvPr id="9" name="Image 0" descr="preencoded.png">    </p:cNvPr>
           <p:cNvPicPr>
             <a:picLocks noChangeAspect="1"/>
           </p:cNvPicPr>
@@ -5396,7 +5816,7 @@
       </p:pic>
       <p:sp>
         <p:nvSpPr>
-          <p:cNvPr id="7" name="Text 4"/>
+          <p:cNvPr id="10" name="Text 7"/>
           <p:cNvSpPr txBox="1"/>
           <p:nvPr/>
         </p:nvSpPr>
@@ -5458,7 +5878,7 @@
       </p:sp>
       <p:sp>
         <p:nvSpPr>
-          <p:cNvPr id="8" name="Text 5"/>
+          <p:cNvPr id="11" name="Text 8"/>
           <p:cNvSpPr txBox="1"/>
           <p:nvPr/>
         </p:nvSpPr>
@@ -5520,7 +5940,7 @@
       </p:sp>
       <p:sp>
         <p:nvSpPr>
-          <p:cNvPr id="9" name="Shape 6"/>
+          <p:cNvPr id="12" name="Shape 9"/>
           <p:cNvSpPr/>
           <p:nvPr/>
         </p:nvSpPr>
@@ -5540,7 +5960,7 @@
       </p:sp>
       <p:sp>
         <p:nvSpPr>
-          <p:cNvPr id="10" name="Shape 7"/>
+          <p:cNvPr id="13" name="Shape 10"/>
           <p:cNvSpPr/>
           <p:nvPr/>
         </p:nvSpPr>
@@ -5560,7 +5980,7 @@
       </p:sp>
       <p:sp>
         <p:nvSpPr>
-          <p:cNvPr id="11" name="Text 8"/>
+          <p:cNvPr id="14" name="Text 11"/>
           <p:cNvSpPr txBox="1"/>
           <p:nvPr/>
         </p:nvSpPr>
@@ -5670,7 +6090,91 @@
       </p:sp>
       <p:sp>
         <p:nvSpPr>
-          <p:cNvPr id="3" name="Text 1"/>
+          <p:cNvPr id="3" name="Shape 1"/>
+          <p:cNvSpPr/>
+          <p:nvPr/>
+        </p:nvSpPr>
+        <p:spPr>
+          <a:xfrm>
+            <a:off x="9619488" y="182880"/>
+            <a:ext cx="2011680" cy="859536"/>
+          </a:xfrm>
+          <a:prstGeom prst="rect">
+            <a:avLst/>
+          </a:prstGeom>
+          <a:solidFill>
+            <a:srgbClr val="FFFFFF"/>
+          </a:solidFill>
+          <a:ln/>
+        </p:spPr>
+      </p:sp>
+      <p:sp>
+        <p:nvSpPr>
+          <p:cNvPr id="4" name="Shape 2"/>
+          <p:cNvSpPr/>
+          <p:nvPr/>
+        </p:nvSpPr>
+        <p:spPr>
+          <a:xfrm>
+            <a:off x="9710928" y="274320"/>
+            <a:ext cx="1828800" cy="676656"/>
+          </a:xfrm>
+          <a:prstGeom prst="rect">
+            <a:avLst/>
+          </a:prstGeom>
+          <a:solidFill>
+            <a:srgbClr val="F1F4F6"/>
+          </a:solidFill>
+          <a:ln w="12700">
+            <a:solidFill>
+              <a:srgbClr val="B6C6D0"/>
+            </a:solidFill>
+            <a:prstDash val="dash"/>
+          </a:ln>
+        </p:spPr>
+      </p:sp>
+      <p:sp>
+        <p:nvSpPr>
+          <p:cNvPr id="5" name="Text 3"/>
+          <p:cNvSpPr txBox="1"/>
+          <p:nvPr/>
+        </p:nvSpPr>
+        <p:spPr>
+          <a:xfrm>
+            <a:off x="9710928" y="274320"/>
+            <a:ext cx="1828800" cy="676656"/>
+          </a:xfrm>
+          <a:prstGeom prst="rect">
+            <a:avLst/>
+          </a:prstGeom>
+          <a:noFill/>
+          <a:ln/>
+        </p:spPr>
+        <p:txBody>
+          <a:bodyPr wrap="square" lIns="0" tIns="0" rIns="0" bIns="0" rtlCol="0" anchor="ctr"/>
+          <a:lstStyle/>
+          <a:p>
+            <a:pPr algn="ctr" indent="0" marL="0">
+              <a:buNone/>
+            </a:pPr>
+            <a:r>
+              <a:rPr lang="en-US" sz="1200" b="1" spc="200" kern="0" dirty="0">
+                <a:solidFill>
+                  <a:srgbClr val="8FA3B0"/>
+                </a:solidFill>
+                <a:latin typeface="Arial" pitchFamily="34" charset="0"/>
+                <a:ea typeface="Arial" pitchFamily="34" charset="-122"/>
+                <a:cs typeface="Arial" pitchFamily="34" charset="-120"/>
+              </a:rPr>
+              <a:t>LOGO</a:t>
+            </a:r>
+            <a:endParaRPr lang="en-US" sz="1200" dirty="0"/>
+          </a:p>
+        </p:txBody>
+      </p:sp>
+      <p:sp>
+        <p:nvSpPr>
+          <p:cNvPr id="6" name="Text 4"/>
           <p:cNvSpPr txBox="1"/>
           <p:nvPr/>
         </p:nvSpPr>
@@ -5709,7 +6213,7 @@
       </p:sp>
       <p:sp>
         <p:nvSpPr>
-          <p:cNvPr id="4" name="Shape 2"/>
+          <p:cNvPr id="7" name="Shape 5"/>
           <p:cNvSpPr/>
           <p:nvPr/>
         </p:nvSpPr>
@@ -5729,7 +6233,7 @@
       </p:sp>
       <p:pic>
         <p:nvPicPr>
-          <p:cNvPr id="5" name="Image 0" descr="preencoded.png">    </p:cNvPr>
+          <p:cNvPr id="8" name="Image 0" descr="preencoded.png">    </p:cNvPr>
           <p:cNvPicPr>
             <a:picLocks noChangeAspect="1"/>
           </p:cNvPicPr>
@@ -5753,7 +6257,7 @@
       </p:pic>
       <p:sp>
         <p:nvSpPr>
-          <p:cNvPr id="6" name="Text 3"/>
+          <p:cNvPr id="9" name="Text 6"/>
           <p:cNvSpPr txBox="1"/>
           <p:nvPr/>
         </p:nvSpPr>
@@ -5792,7 +6296,7 @@
       </p:sp>
       <p:sp>
         <p:nvSpPr>
-          <p:cNvPr id="7" name="Text 4"/>
+          <p:cNvPr id="10" name="Text 7"/>
           <p:cNvSpPr txBox="1"/>
           <p:nvPr/>
         </p:nvSpPr>
@@ -5831,7 +6335,7 @@
       </p:sp>
       <p:sp>
         <p:nvSpPr>
-          <p:cNvPr id="8" name="Text 5"/>
+          <p:cNvPr id="11" name="Text 8"/>
           <p:cNvSpPr txBox="1"/>
           <p:nvPr/>
         </p:nvSpPr>
@@ -5970,6 +6474,90 @@
         </p:nvSpPr>
         <p:spPr>
           <a:xfrm>
+            <a:off x="9619488" y="182880"/>
+            <a:ext cx="2011680" cy="859536"/>
+          </a:xfrm>
+          <a:prstGeom prst="rect">
+            <a:avLst/>
+          </a:prstGeom>
+          <a:solidFill>
+            <a:srgbClr val="FFFFFF"/>
+          </a:solidFill>
+          <a:ln/>
+        </p:spPr>
+      </p:sp>
+      <p:sp>
+        <p:nvSpPr>
+          <p:cNvPr id="4" name="Shape 2"/>
+          <p:cNvSpPr/>
+          <p:nvPr/>
+        </p:nvSpPr>
+        <p:spPr>
+          <a:xfrm>
+            <a:off x="9710928" y="274320"/>
+            <a:ext cx="1828800" cy="676656"/>
+          </a:xfrm>
+          <a:prstGeom prst="rect">
+            <a:avLst/>
+          </a:prstGeom>
+          <a:solidFill>
+            <a:srgbClr val="F1F4F6"/>
+          </a:solidFill>
+          <a:ln w="12700">
+            <a:solidFill>
+              <a:srgbClr val="B6C6D0"/>
+            </a:solidFill>
+            <a:prstDash val="dash"/>
+          </a:ln>
+        </p:spPr>
+      </p:sp>
+      <p:sp>
+        <p:nvSpPr>
+          <p:cNvPr id="5" name="Text 3"/>
+          <p:cNvSpPr txBox="1"/>
+          <p:nvPr/>
+        </p:nvSpPr>
+        <p:spPr>
+          <a:xfrm>
+            <a:off x="9710928" y="274320"/>
+            <a:ext cx="1828800" cy="676656"/>
+          </a:xfrm>
+          <a:prstGeom prst="rect">
+            <a:avLst/>
+          </a:prstGeom>
+          <a:noFill/>
+          <a:ln/>
+        </p:spPr>
+        <p:txBody>
+          <a:bodyPr wrap="square" lIns="0" tIns="0" rIns="0" bIns="0" rtlCol="0" anchor="ctr"/>
+          <a:lstStyle/>
+          <a:p>
+            <a:pPr algn="ctr" indent="0" marL="0">
+              <a:buNone/>
+            </a:pPr>
+            <a:r>
+              <a:rPr lang="en-US" sz="1200" b="1" spc="200" kern="0" dirty="0">
+                <a:solidFill>
+                  <a:srgbClr val="8FA3B0"/>
+                </a:solidFill>
+                <a:latin typeface="Arial" pitchFamily="34" charset="0"/>
+                <a:ea typeface="Arial" pitchFamily="34" charset="-122"/>
+                <a:cs typeface="Arial" pitchFamily="34" charset="-120"/>
+              </a:rPr>
+              <a:t>LOGO</a:t>
+            </a:r>
+            <a:endParaRPr lang="en-US" sz="1200" dirty="0"/>
+          </a:p>
+        </p:txBody>
+      </p:sp>
+      <p:sp>
+        <p:nvSpPr>
+          <p:cNvPr id="6" name="Shape 4"/>
+          <p:cNvSpPr/>
+          <p:nvPr/>
+        </p:nvSpPr>
+        <p:spPr>
+          <a:xfrm>
             <a:off x="566928" y="685800"/>
             <a:ext cx="1188720" cy="1188720"/>
           </a:xfrm>
@@ -5984,7 +6572,7 @@
       </p:sp>
       <p:pic>
         <p:nvPicPr>
-          <p:cNvPr id="4" name="Image 0" descr="preencoded.png">    </p:cNvPr>
+          <p:cNvPr id="7" name="Image 0" descr="preencoded.png">    </p:cNvPr>
           <p:cNvPicPr>
             <a:picLocks noChangeAspect="1"/>
           </p:cNvPicPr>
@@ -6008,7 +6596,7 @@
       </p:pic>
       <p:sp>
         <p:nvSpPr>
-          <p:cNvPr id="5" name="Text 2"/>
+          <p:cNvPr id="8" name="Text 5"/>
           <p:cNvSpPr txBox="1"/>
           <p:nvPr/>
         </p:nvSpPr>
@@ -6047,7 +6635,7 @@
       </p:sp>
       <p:sp>
         <p:nvSpPr>
-          <p:cNvPr id="6" name="Shape 3"/>
+          <p:cNvPr id="9" name="Shape 6"/>
           <p:cNvSpPr/>
           <p:nvPr/>
         </p:nvSpPr>
@@ -6067,7 +6655,7 @@
       </p:sp>
       <p:pic>
         <p:nvPicPr>
-          <p:cNvPr id="7" name="Image 1" descr="preencoded.png">    </p:cNvPr>
+          <p:cNvPr id="10" name="Image 1" descr="preencoded.png">    </p:cNvPr>
           <p:cNvPicPr>
             <a:picLocks noChangeAspect="1"/>
           </p:cNvPicPr>
@@ -6091,7 +6679,7 @@
       </p:pic>
       <p:sp>
         <p:nvSpPr>
-          <p:cNvPr id="8" name="Text 4"/>
+          <p:cNvPr id="11" name="Text 7"/>
           <p:cNvSpPr txBox="1"/>
           <p:nvPr/>
         </p:nvSpPr>
@@ -6130,7 +6718,7 @@
       </p:sp>
       <p:sp>
         <p:nvSpPr>
-          <p:cNvPr id="9" name="Text 5"/>
+          <p:cNvPr id="12" name="Text 8"/>
           <p:cNvSpPr txBox="1"/>
           <p:nvPr/>
         </p:nvSpPr>
@@ -6192,7 +6780,7 @@
       </p:sp>
       <p:sp>
         <p:nvSpPr>
-          <p:cNvPr id="10" name="Shape 6"/>
+          <p:cNvPr id="13" name="Shape 9"/>
           <p:cNvSpPr/>
           <p:nvPr/>
         </p:nvSpPr>
@@ -6212,7 +6800,7 @@
       </p:sp>
       <p:pic>
         <p:nvPicPr>
-          <p:cNvPr id="11" name="Image 2" descr="preencoded.png">    </p:cNvPr>
+          <p:cNvPr id="14" name="Image 2" descr="preencoded.png">    </p:cNvPr>
           <p:cNvPicPr>
             <a:picLocks noChangeAspect="1"/>
           </p:cNvPicPr>
@@ -6236,7 +6824,7 @@
       </p:pic>
       <p:sp>
         <p:nvSpPr>
-          <p:cNvPr id="12" name="Text 7"/>
+          <p:cNvPr id="15" name="Text 10"/>
           <p:cNvSpPr txBox="1"/>
           <p:nvPr/>
         </p:nvSpPr>
@@ -6275,7 +6863,7 @@
       </p:sp>
       <p:sp>
         <p:nvSpPr>
-          <p:cNvPr id="13" name="Text 8"/>
+          <p:cNvPr id="16" name="Text 11"/>
           <p:cNvSpPr txBox="1"/>
           <p:nvPr/>
         </p:nvSpPr>
@@ -6337,7 +6925,7 @@
       </p:sp>
       <p:sp>
         <p:nvSpPr>
-          <p:cNvPr id="14" name="Shape 9"/>
+          <p:cNvPr id="17" name="Shape 12"/>
           <p:cNvSpPr/>
           <p:nvPr/>
         </p:nvSpPr>
@@ -6357,7 +6945,7 @@
       </p:sp>
       <p:pic>
         <p:nvPicPr>
-          <p:cNvPr id="15" name="Image 3" descr="preencoded.png">    </p:cNvPr>
+          <p:cNvPr id="18" name="Image 3" descr="preencoded.png">    </p:cNvPr>
           <p:cNvPicPr>
             <a:picLocks noChangeAspect="1"/>
           </p:cNvPicPr>
@@ -6381,7 +6969,7 @@
       </p:pic>
       <p:sp>
         <p:nvSpPr>
-          <p:cNvPr id="16" name="Text 10"/>
+          <p:cNvPr id="19" name="Text 13"/>
           <p:cNvSpPr txBox="1"/>
           <p:nvPr/>
         </p:nvSpPr>
@@ -6420,7 +7008,7 @@
       </p:sp>
       <p:sp>
         <p:nvSpPr>
-          <p:cNvPr id="17" name="Text 11"/>
+          <p:cNvPr id="20" name="Text 14"/>
           <p:cNvSpPr txBox="1"/>
           <p:nvPr/>
         </p:nvSpPr>
@@ -6482,7 +7070,7 @@
       </p:sp>
       <p:sp>
         <p:nvSpPr>
-          <p:cNvPr id="18" name="Shape 12"/>
+          <p:cNvPr id="21" name="Shape 15"/>
           <p:cNvSpPr/>
           <p:nvPr/>
         </p:nvSpPr>
@@ -6502,7 +7090,7 @@
       </p:sp>
       <p:pic>
         <p:nvPicPr>
-          <p:cNvPr id="19" name="Image 4" descr="preencoded.png">    </p:cNvPr>
+          <p:cNvPr id="22" name="Image 4" descr="preencoded.png">    </p:cNvPr>
           <p:cNvPicPr>
             <a:picLocks noChangeAspect="1"/>
           </p:cNvPicPr>
@@ -6526,7 +7114,7 @@
       </p:pic>
       <p:sp>
         <p:nvSpPr>
-          <p:cNvPr id="20" name="Text 13"/>
+          <p:cNvPr id="23" name="Text 16"/>
           <p:cNvSpPr txBox="1"/>
           <p:nvPr/>
         </p:nvSpPr>
@@ -6565,7 +7153,7 @@
       </p:sp>
       <p:sp>
         <p:nvSpPr>
-          <p:cNvPr id="21" name="Text 14"/>
+          <p:cNvPr id="24" name="Text 17"/>
           <p:cNvSpPr txBox="1"/>
           <p:nvPr/>
         </p:nvSpPr>
@@ -6704,6 +7292,90 @@
         </p:nvSpPr>
         <p:spPr>
           <a:xfrm>
+            <a:off x="9619488" y="182880"/>
+            <a:ext cx="2011680" cy="859536"/>
+          </a:xfrm>
+          <a:prstGeom prst="rect">
+            <a:avLst/>
+          </a:prstGeom>
+          <a:solidFill>
+            <a:srgbClr val="FFFFFF"/>
+          </a:solidFill>
+          <a:ln/>
+        </p:spPr>
+      </p:sp>
+      <p:sp>
+        <p:nvSpPr>
+          <p:cNvPr id="4" name="Shape 2"/>
+          <p:cNvSpPr/>
+          <p:nvPr/>
+        </p:nvSpPr>
+        <p:spPr>
+          <a:xfrm>
+            <a:off x="9710928" y="274320"/>
+            <a:ext cx="1828800" cy="676656"/>
+          </a:xfrm>
+          <a:prstGeom prst="rect">
+            <a:avLst/>
+          </a:prstGeom>
+          <a:solidFill>
+            <a:srgbClr val="F1F4F6"/>
+          </a:solidFill>
+          <a:ln w="12700">
+            <a:solidFill>
+              <a:srgbClr val="B6C6D0"/>
+            </a:solidFill>
+            <a:prstDash val="dash"/>
+          </a:ln>
+        </p:spPr>
+      </p:sp>
+      <p:sp>
+        <p:nvSpPr>
+          <p:cNvPr id="5" name="Text 3"/>
+          <p:cNvSpPr txBox="1"/>
+          <p:nvPr/>
+        </p:nvSpPr>
+        <p:spPr>
+          <a:xfrm>
+            <a:off x="9710928" y="274320"/>
+            <a:ext cx="1828800" cy="676656"/>
+          </a:xfrm>
+          <a:prstGeom prst="rect">
+            <a:avLst/>
+          </a:prstGeom>
+          <a:noFill/>
+          <a:ln/>
+        </p:spPr>
+        <p:txBody>
+          <a:bodyPr wrap="square" lIns="0" tIns="0" rIns="0" bIns="0" rtlCol="0" anchor="ctr"/>
+          <a:lstStyle/>
+          <a:p>
+            <a:pPr algn="ctr" indent="0" marL="0">
+              <a:buNone/>
+            </a:pPr>
+            <a:r>
+              <a:rPr lang="en-US" sz="1200" b="1" spc="200" kern="0" dirty="0">
+                <a:solidFill>
+                  <a:srgbClr val="8FA3B0"/>
+                </a:solidFill>
+                <a:latin typeface="Arial" pitchFamily="34" charset="0"/>
+                <a:ea typeface="Arial" pitchFamily="34" charset="-122"/>
+                <a:cs typeface="Arial" pitchFamily="34" charset="-120"/>
+              </a:rPr>
+              <a:t>LOGO</a:t>
+            </a:r>
+            <a:endParaRPr lang="en-US" sz="1200" dirty="0"/>
+          </a:p>
+        </p:txBody>
+      </p:sp>
+      <p:sp>
+        <p:nvSpPr>
+          <p:cNvPr id="6" name="Shape 4"/>
+          <p:cNvSpPr/>
+          <p:nvPr/>
+        </p:nvSpPr>
+        <p:spPr>
+          <a:xfrm>
             <a:off x="566928" y="685800"/>
             <a:ext cx="1188720" cy="1188720"/>
           </a:xfrm>
@@ -6718,7 +7390,7 @@
       </p:sp>
       <p:pic>
         <p:nvPicPr>
-          <p:cNvPr id="4" name="Image 0" descr="preencoded.png">    </p:cNvPr>
+          <p:cNvPr id="7" name="Image 0" descr="preencoded.png">    </p:cNvPr>
           <p:cNvPicPr>
             <a:picLocks noChangeAspect="1"/>
           </p:cNvPicPr>
@@ -6742,7 +7414,7 @@
       </p:pic>
       <p:sp>
         <p:nvSpPr>
-          <p:cNvPr id="5" name="Text 2"/>
+          <p:cNvPr id="8" name="Text 5"/>
           <p:cNvSpPr txBox="1"/>
           <p:nvPr/>
         </p:nvSpPr>
@@ -6781,7 +7453,7 @@
       </p:sp>
       <p:sp>
         <p:nvSpPr>
-          <p:cNvPr id="6" name="Shape 3"/>
+          <p:cNvPr id="9" name="Shape 6"/>
           <p:cNvSpPr/>
           <p:nvPr/>
         </p:nvSpPr>
@@ -6801,7 +7473,7 @@
       </p:sp>
       <p:sp>
         <p:nvSpPr>
-          <p:cNvPr id="7" name="Shape 4"/>
+          <p:cNvPr id="10" name="Shape 7"/>
           <p:cNvSpPr/>
           <p:nvPr/>
         </p:nvSpPr>
@@ -6821,7 +7493,7 @@
       </p:sp>
       <p:sp>
         <p:nvSpPr>
-          <p:cNvPr id="8" name="Text 5"/>
+          <p:cNvPr id="11" name="Text 8"/>
           <p:cNvSpPr txBox="1"/>
           <p:nvPr/>
         </p:nvSpPr>
@@ -6932,7 +7604,7 @@
       </p:sp>
       <p:sp>
         <p:nvSpPr>
-          <p:cNvPr id="9" name="Shape 6"/>
+          <p:cNvPr id="12" name="Shape 9"/>
           <p:cNvSpPr/>
           <p:nvPr/>
         </p:nvSpPr>
@@ -6952,7 +7624,7 @@
       </p:sp>
       <p:sp>
         <p:nvSpPr>
-          <p:cNvPr id="10" name="Text 7"/>
+          <p:cNvPr id="13" name="Text 10"/>
           <p:cNvSpPr txBox="1"/>
           <p:nvPr/>
         </p:nvSpPr>
@@ -6991,7 +7663,7 @@
       </p:sp>
       <p:sp>
         <p:nvSpPr>
-          <p:cNvPr id="11" name="Shape 8"/>
+          <p:cNvPr id="14" name="Shape 11"/>
           <p:cNvSpPr/>
           <p:nvPr/>
         </p:nvSpPr>
@@ -7011,7 +7683,7 @@
       </p:sp>
       <p:sp>
         <p:nvSpPr>
-          <p:cNvPr id="12" name="Text 9"/>
+          <p:cNvPr id="15" name="Text 12"/>
           <p:cNvSpPr txBox="1"/>
           <p:nvPr/>
         </p:nvSpPr>
@@ -7050,7 +7722,7 @@
       </p:sp>
       <p:sp>
         <p:nvSpPr>
-          <p:cNvPr id="13" name="Shape 10"/>
+          <p:cNvPr id="16" name="Shape 13"/>
           <p:cNvSpPr/>
           <p:nvPr/>
         </p:nvSpPr>
@@ -7070,7 +7742,7 @@
       </p:sp>
       <p:sp>
         <p:nvSpPr>
-          <p:cNvPr id="14" name="Text 11"/>
+          <p:cNvPr id="17" name="Text 14"/>
           <p:cNvSpPr txBox="1"/>
           <p:nvPr/>
         </p:nvSpPr>
@@ -7109,7 +7781,7 @@
       </p:sp>
       <p:sp>
         <p:nvSpPr>
-          <p:cNvPr id="15" name="Shape 12"/>
+          <p:cNvPr id="18" name="Shape 15"/>
           <p:cNvSpPr/>
           <p:nvPr/>
         </p:nvSpPr>
@@ -7129,7 +7801,7 @@
       </p:sp>
       <p:sp>
         <p:nvSpPr>
-          <p:cNvPr id="16" name="Text 13"/>
+          <p:cNvPr id="19" name="Text 16"/>
           <p:cNvSpPr txBox="1"/>
           <p:nvPr/>
         </p:nvSpPr>
@@ -7168,7 +7840,7 @@
       </p:sp>
       <p:sp>
         <p:nvSpPr>
-          <p:cNvPr id="17" name="Text 14"/>
+          <p:cNvPr id="20" name="Text 17"/>
           <p:cNvSpPr txBox="1"/>
           <p:nvPr/>
         </p:nvSpPr>
@@ -7343,6 +8015,90 @@
         </p:nvSpPr>
         <p:spPr>
           <a:xfrm>
+            <a:off x="9619488" y="182880"/>
+            <a:ext cx="2011680" cy="859536"/>
+          </a:xfrm>
+          <a:prstGeom prst="rect">
+            <a:avLst/>
+          </a:prstGeom>
+          <a:solidFill>
+            <a:srgbClr val="FFFFFF"/>
+          </a:solidFill>
+          <a:ln/>
+        </p:spPr>
+      </p:sp>
+      <p:sp>
+        <p:nvSpPr>
+          <p:cNvPr id="6" name="Shape 4"/>
+          <p:cNvSpPr/>
+          <p:nvPr/>
+        </p:nvSpPr>
+        <p:spPr>
+          <a:xfrm>
+            <a:off x="9710928" y="274320"/>
+            <a:ext cx="1828800" cy="676656"/>
+          </a:xfrm>
+          <a:prstGeom prst="rect">
+            <a:avLst/>
+          </a:prstGeom>
+          <a:solidFill>
+            <a:srgbClr val="F1F4F6"/>
+          </a:solidFill>
+          <a:ln w="12700">
+            <a:solidFill>
+              <a:srgbClr val="B6C6D0"/>
+            </a:solidFill>
+            <a:prstDash val="dash"/>
+          </a:ln>
+        </p:spPr>
+      </p:sp>
+      <p:sp>
+        <p:nvSpPr>
+          <p:cNvPr id="7" name="Text 5"/>
+          <p:cNvSpPr txBox="1"/>
+          <p:nvPr/>
+        </p:nvSpPr>
+        <p:spPr>
+          <a:xfrm>
+            <a:off x="9710928" y="274320"/>
+            <a:ext cx="1828800" cy="676656"/>
+          </a:xfrm>
+          <a:prstGeom prst="rect">
+            <a:avLst/>
+          </a:prstGeom>
+          <a:noFill/>
+          <a:ln/>
+        </p:spPr>
+        <p:txBody>
+          <a:bodyPr wrap="square" lIns="0" tIns="0" rIns="0" bIns="0" rtlCol="0" anchor="ctr"/>
+          <a:lstStyle/>
+          <a:p>
+            <a:pPr algn="ctr" indent="0" marL="0">
+              <a:buNone/>
+            </a:pPr>
+            <a:r>
+              <a:rPr lang="en-US" sz="1200" b="1" spc="200" kern="0" dirty="0">
+                <a:solidFill>
+                  <a:srgbClr val="8FA3B0"/>
+                </a:solidFill>
+                <a:latin typeface="Arial" pitchFamily="34" charset="0"/>
+                <a:ea typeface="Arial" pitchFamily="34" charset="-122"/>
+                <a:cs typeface="Arial" pitchFamily="34" charset="-120"/>
+              </a:rPr>
+              <a:t>LOGO</a:t>
+            </a:r>
+            <a:endParaRPr lang="en-US" sz="1200" dirty="0"/>
+          </a:p>
+        </p:txBody>
+      </p:sp>
+      <p:sp>
+        <p:nvSpPr>
+          <p:cNvPr id="8" name="Shape 6"/>
+          <p:cNvSpPr/>
+          <p:nvPr/>
+        </p:nvSpPr>
+        <p:spPr>
+          <a:xfrm>
             <a:off x="9646920" y="1143000"/>
             <a:ext cx="1920240" cy="1920240"/>
           </a:xfrm>
@@ -7357,7 +8113,7 @@
       </p:sp>
       <p:pic>
         <p:nvPicPr>
-          <p:cNvPr id="6" name="Image 0" descr="preencoded.png">    </p:cNvPr>
+          <p:cNvPr id="9" name="Image 0" descr="preencoded.png">    </p:cNvPr>
           <p:cNvPicPr>
             <a:picLocks noChangeAspect="1"/>
           </p:cNvPicPr>
@@ -7381,7 +8137,7 @@
       </p:pic>
       <p:sp>
         <p:nvSpPr>
-          <p:cNvPr id="7" name="Text 4"/>
+          <p:cNvPr id="10" name="Text 7"/>
           <p:cNvSpPr txBox="1"/>
           <p:nvPr/>
         </p:nvSpPr>
@@ -7443,7 +8199,7 @@
       </p:sp>
       <p:sp>
         <p:nvSpPr>
-          <p:cNvPr id="8" name="Text 5"/>
+          <p:cNvPr id="11" name="Text 8"/>
           <p:cNvSpPr txBox="1"/>
           <p:nvPr/>
         </p:nvSpPr>
@@ -7505,7 +8261,7 @@
       </p:sp>
       <p:sp>
         <p:nvSpPr>
-          <p:cNvPr id="9" name="Shape 6"/>
+          <p:cNvPr id="12" name="Shape 9"/>
           <p:cNvSpPr/>
           <p:nvPr/>
         </p:nvSpPr>
@@ -7525,7 +8281,7 @@
       </p:sp>
       <p:sp>
         <p:nvSpPr>
-          <p:cNvPr id="10" name="Shape 7"/>
+          <p:cNvPr id="13" name="Shape 10"/>
           <p:cNvSpPr/>
           <p:nvPr/>
         </p:nvSpPr>
@@ -7545,7 +8301,7 @@
       </p:sp>
       <p:sp>
         <p:nvSpPr>
-          <p:cNvPr id="11" name="Text 8"/>
+          <p:cNvPr id="14" name="Text 11"/>
           <p:cNvSpPr txBox="1"/>
           <p:nvPr/>
         </p:nvSpPr>
@@ -7655,7 +8411,91 @@
       </p:sp>
       <p:sp>
         <p:nvSpPr>
-          <p:cNvPr id="3" name="Text 1"/>
+          <p:cNvPr id="3" name="Shape 1"/>
+          <p:cNvSpPr/>
+          <p:nvPr/>
+        </p:nvSpPr>
+        <p:spPr>
+          <a:xfrm>
+            <a:off x="9619488" y="182880"/>
+            <a:ext cx="2011680" cy="859536"/>
+          </a:xfrm>
+          <a:prstGeom prst="rect">
+            <a:avLst/>
+          </a:prstGeom>
+          <a:solidFill>
+            <a:srgbClr val="FFFFFF"/>
+          </a:solidFill>
+          <a:ln/>
+        </p:spPr>
+      </p:sp>
+      <p:sp>
+        <p:nvSpPr>
+          <p:cNvPr id="4" name="Shape 2"/>
+          <p:cNvSpPr/>
+          <p:nvPr/>
+        </p:nvSpPr>
+        <p:spPr>
+          <a:xfrm>
+            <a:off x="9710928" y="274320"/>
+            <a:ext cx="1828800" cy="676656"/>
+          </a:xfrm>
+          <a:prstGeom prst="rect">
+            <a:avLst/>
+          </a:prstGeom>
+          <a:solidFill>
+            <a:srgbClr val="F1F4F6"/>
+          </a:solidFill>
+          <a:ln w="12700">
+            <a:solidFill>
+              <a:srgbClr val="B6C6D0"/>
+            </a:solidFill>
+            <a:prstDash val="dash"/>
+          </a:ln>
+        </p:spPr>
+      </p:sp>
+      <p:sp>
+        <p:nvSpPr>
+          <p:cNvPr id="5" name="Text 3"/>
+          <p:cNvSpPr txBox="1"/>
+          <p:nvPr/>
+        </p:nvSpPr>
+        <p:spPr>
+          <a:xfrm>
+            <a:off x="9710928" y="274320"/>
+            <a:ext cx="1828800" cy="676656"/>
+          </a:xfrm>
+          <a:prstGeom prst="rect">
+            <a:avLst/>
+          </a:prstGeom>
+          <a:noFill/>
+          <a:ln/>
+        </p:spPr>
+        <p:txBody>
+          <a:bodyPr wrap="square" lIns="0" tIns="0" rIns="0" bIns="0" rtlCol="0" anchor="ctr"/>
+          <a:lstStyle/>
+          <a:p>
+            <a:pPr algn="ctr" indent="0" marL="0">
+              <a:buNone/>
+            </a:pPr>
+            <a:r>
+              <a:rPr lang="en-US" sz="1200" b="1" spc="200" kern="0" dirty="0">
+                <a:solidFill>
+                  <a:srgbClr val="8FA3B0"/>
+                </a:solidFill>
+                <a:latin typeface="Arial" pitchFamily="34" charset="0"/>
+                <a:ea typeface="Arial" pitchFamily="34" charset="-122"/>
+                <a:cs typeface="Arial" pitchFamily="34" charset="-120"/>
+              </a:rPr>
+              <a:t>LOGO</a:t>
+            </a:r>
+            <a:endParaRPr lang="en-US" sz="1200" dirty="0"/>
+          </a:p>
+        </p:txBody>
+      </p:sp>
+      <p:sp>
+        <p:nvSpPr>
+          <p:cNvPr id="6" name="Text 4"/>
           <p:cNvSpPr txBox="1"/>
           <p:nvPr/>
         </p:nvSpPr>
@@ -7694,7 +8534,7 @@
       </p:sp>
       <p:sp>
         <p:nvSpPr>
-          <p:cNvPr id="4" name="Shape 2"/>
+          <p:cNvPr id="7" name="Shape 5"/>
           <p:cNvSpPr/>
           <p:nvPr/>
         </p:nvSpPr>
@@ -7714,7 +8554,7 @@
       </p:sp>
       <p:pic>
         <p:nvPicPr>
-          <p:cNvPr id="5" name="Image 0" descr="preencoded.png">    </p:cNvPr>
+          <p:cNvPr id="8" name="Image 0" descr="preencoded.png">    </p:cNvPr>
           <p:cNvPicPr>
             <a:picLocks noChangeAspect="1"/>
           </p:cNvPicPr>
@@ -7738,7 +8578,7 @@
       </p:pic>
       <p:sp>
         <p:nvSpPr>
-          <p:cNvPr id="6" name="Text 3"/>
+          <p:cNvPr id="9" name="Text 6"/>
           <p:cNvSpPr txBox="1"/>
           <p:nvPr/>
         </p:nvSpPr>
@@ -7777,7 +8617,7 @@
       </p:sp>
       <p:sp>
         <p:nvSpPr>
-          <p:cNvPr id="7" name="Text 4"/>
+          <p:cNvPr id="10" name="Text 7"/>
           <p:cNvSpPr txBox="1"/>
           <p:nvPr/>
         </p:nvSpPr>
@@ -7816,7 +8656,7 @@
       </p:sp>
       <p:sp>
         <p:nvSpPr>
-          <p:cNvPr id="8" name="Text 5"/>
+          <p:cNvPr id="11" name="Text 8"/>
           <p:cNvSpPr txBox="1"/>
           <p:nvPr/>
         </p:nvSpPr>
@@ -7994,6 +8834,90 @@
         </p:nvSpPr>
         <p:spPr>
           <a:xfrm>
+            <a:off x="9619488" y="182880"/>
+            <a:ext cx="2011680" cy="859536"/>
+          </a:xfrm>
+          <a:prstGeom prst="rect">
+            <a:avLst/>
+          </a:prstGeom>
+          <a:solidFill>
+            <a:srgbClr val="FFFFFF"/>
+          </a:solidFill>
+          <a:ln/>
+        </p:spPr>
+      </p:sp>
+      <p:sp>
+        <p:nvSpPr>
+          <p:cNvPr id="6" name="Shape 4"/>
+          <p:cNvSpPr/>
+          <p:nvPr/>
+        </p:nvSpPr>
+        <p:spPr>
+          <a:xfrm>
+            <a:off x="9710928" y="274320"/>
+            <a:ext cx="1828800" cy="676656"/>
+          </a:xfrm>
+          <a:prstGeom prst="rect">
+            <a:avLst/>
+          </a:prstGeom>
+          <a:solidFill>
+            <a:srgbClr val="F1F4F6"/>
+          </a:solidFill>
+          <a:ln w="12700">
+            <a:solidFill>
+              <a:srgbClr val="B6C6D0"/>
+            </a:solidFill>
+            <a:prstDash val="dash"/>
+          </a:ln>
+        </p:spPr>
+      </p:sp>
+      <p:sp>
+        <p:nvSpPr>
+          <p:cNvPr id="7" name="Text 5"/>
+          <p:cNvSpPr txBox="1"/>
+          <p:nvPr/>
+        </p:nvSpPr>
+        <p:spPr>
+          <a:xfrm>
+            <a:off x="9710928" y="274320"/>
+            <a:ext cx="1828800" cy="676656"/>
+          </a:xfrm>
+          <a:prstGeom prst="rect">
+            <a:avLst/>
+          </a:prstGeom>
+          <a:noFill/>
+          <a:ln/>
+        </p:spPr>
+        <p:txBody>
+          <a:bodyPr wrap="square" lIns="0" tIns="0" rIns="0" bIns="0" rtlCol="0" anchor="ctr"/>
+          <a:lstStyle/>
+          <a:p>
+            <a:pPr algn="ctr" indent="0" marL="0">
+              <a:buNone/>
+            </a:pPr>
+            <a:r>
+              <a:rPr lang="en-US" sz="1200" b="1" spc="200" kern="0" dirty="0">
+                <a:solidFill>
+                  <a:srgbClr val="8FA3B0"/>
+                </a:solidFill>
+                <a:latin typeface="Arial" pitchFamily="34" charset="0"/>
+                <a:ea typeface="Arial" pitchFamily="34" charset="-122"/>
+                <a:cs typeface="Arial" pitchFamily="34" charset="-120"/>
+              </a:rPr>
+              <a:t>LOGO</a:t>
+            </a:r>
+            <a:endParaRPr lang="en-US" sz="1200" dirty="0"/>
+          </a:p>
+        </p:txBody>
+      </p:sp>
+      <p:sp>
+        <p:nvSpPr>
+          <p:cNvPr id="8" name="Shape 6"/>
+          <p:cNvSpPr/>
+          <p:nvPr/>
+        </p:nvSpPr>
+        <p:spPr>
+          <a:xfrm>
             <a:off x="9646920" y="1143000"/>
             <a:ext cx="1920240" cy="1920240"/>
           </a:xfrm>
@@ -8008,7 +8932,7 @@
       </p:sp>
       <p:pic>
         <p:nvPicPr>
-          <p:cNvPr id="6" name="Image 0" descr="preencoded.png">    </p:cNvPr>
+          <p:cNvPr id="9" name="Image 0" descr="preencoded.png">    </p:cNvPr>
           <p:cNvPicPr>
             <a:picLocks noChangeAspect="1"/>
           </p:cNvPicPr>
@@ -8032,7 +8956,7 @@
       </p:pic>
       <p:sp>
         <p:nvSpPr>
-          <p:cNvPr id="7" name="Text 4"/>
+          <p:cNvPr id="10" name="Text 7"/>
           <p:cNvSpPr txBox="1"/>
           <p:nvPr/>
         </p:nvSpPr>
@@ -8074,7 +8998,7 @@
       </p:sp>
       <p:sp>
         <p:nvSpPr>
-          <p:cNvPr id="8" name="Text 5"/>
+          <p:cNvPr id="11" name="Text 8"/>
           <p:cNvSpPr txBox="1"/>
           <p:nvPr/>
         </p:nvSpPr>
@@ -8233,6 +9157,90 @@
         </p:nvSpPr>
         <p:spPr>
           <a:xfrm>
+            <a:off x="9619488" y="182880"/>
+            <a:ext cx="2011680" cy="859536"/>
+          </a:xfrm>
+          <a:prstGeom prst="rect">
+            <a:avLst/>
+          </a:prstGeom>
+          <a:solidFill>
+            <a:srgbClr val="FFFFFF"/>
+          </a:solidFill>
+          <a:ln/>
+        </p:spPr>
+      </p:sp>
+      <p:sp>
+        <p:nvSpPr>
+          <p:cNvPr id="4" name="Shape 2"/>
+          <p:cNvSpPr/>
+          <p:nvPr/>
+        </p:nvSpPr>
+        <p:spPr>
+          <a:xfrm>
+            <a:off x="9710928" y="274320"/>
+            <a:ext cx="1828800" cy="676656"/>
+          </a:xfrm>
+          <a:prstGeom prst="rect">
+            <a:avLst/>
+          </a:prstGeom>
+          <a:solidFill>
+            <a:srgbClr val="F1F4F6"/>
+          </a:solidFill>
+          <a:ln w="12700">
+            <a:solidFill>
+              <a:srgbClr val="B6C6D0"/>
+            </a:solidFill>
+            <a:prstDash val="dash"/>
+          </a:ln>
+        </p:spPr>
+      </p:sp>
+      <p:sp>
+        <p:nvSpPr>
+          <p:cNvPr id="5" name="Text 3"/>
+          <p:cNvSpPr txBox="1"/>
+          <p:nvPr/>
+        </p:nvSpPr>
+        <p:spPr>
+          <a:xfrm>
+            <a:off x="9710928" y="274320"/>
+            <a:ext cx="1828800" cy="676656"/>
+          </a:xfrm>
+          <a:prstGeom prst="rect">
+            <a:avLst/>
+          </a:prstGeom>
+          <a:noFill/>
+          <a:ln/>
+        </p:spPr>
+        <p:txBody>
+          <a:bodyPr wrap="square" lIns="0" tIns="0" rIns="0" bIns="0" rtlCol="0" anchor="ctr"/>
+          <a:lstStyle/>
+          <a:p>
+            <a:pPr algn="ctr" indent="0" marL="0">
+              <a:buNone/>
+            </a:pPr>
+            <a:r>
+              <a:rPr lang="en-US" sz="1200" b="1" spc="200" kern="0" dirty="0">
+                <a:solidFill>
+                  <a:srgbClr val="8FA3B0"/>
+                </a:solidFill>
+                <a:latin typeface="Arial" pitchFamily="34" charset="0"/>
+                <a:ea typeface="Arial" pitchFamily="34" charset="-122"/>
+                <a:cs typeface="Arial" pitchFamily="34" charset="-120"/>
+              </a:rPr>
+              <a:t>LOGO</a:t>
+            </a:r>
+            <a:endParaRPr lang="en-US" sz="1200" dirty="0"/>
+          </a:p>
+        </p:txBody>
+      </p:sp>
+      <p:sp>
+        <p:nvSpPr>
+          <p:cNvPr id="6" name="Shape 4"/>
+          <p:cNvSpPr/>
+          <p:nvPr/>
+        </p:nvSpPr>
+        <p:spPr>
+          <a:xfrm>
             <a:off x="566928" y="685800"/>
             <a:ext cx="1188720" cy="1188720"/>
           </a:xfrm>
@@ -8247,7 +9255,7 @@
       </p:sp>
       <p:pic>
         <p:nvPicPr>
-          <p:cNvPr id="4" name="Image 0" descr="preencoded.png">    </p:cNvPr>
+          <p:cNvPr id="7" name="Image 0" descr="preencoded.png">    </p:cNvPr>
           <p:cNvPicPr>
             <a:picLocks noChangeAspect="1"/>
           </p:cNvPicPr>
@@ -8271,7 +9279,7 @@
       </p:pic>
       <p:sp>
         <p:nvSpPr>
-          <p:cNvPr id="5" name="Text 2"/>
+          <p:cNvPr id="8" name="Text 5"/>
           <p:cNvSpPr txBox="1"/>
           <p:nvPr/>
         </p:nvSpPr>
@@ -8310,7 +9318,7 @@
       </p:sp>
       <p:sp>
         <p:nvSpPr>
-          <p:cNvPr id="6" name="Shape 3"/>
+          <p:cNvPr id="9" name="Shape 6"/>
           <p:cNvSpPr/>
           <p:nvPr/>
         </p:nvSpPr>
@@ -8330,7 +9338,7 @@
       </p:sp>
       <p:sp>
         <p:nvSpPr>
-          <p:cNvPr id="7" name="Shape 4"/>
+          <p:cNvPr id="10" name="Shape 7"/>
           <p:cNvSpPr/>
           <p:nvPr/>
         </p:nvSpPr>
@@ -8350,7 +9358,7 @@
       </p:sp>
       <p:sp>
         <p:nvSpPr>
-          <p:cNvPr id="8" name="Text 5"/>
+          <p:cNvPr id="11" name="Text 8"/>
           <p:cNvSpPr txBox="1"/>
           <p:nvPr/>
         </p:nvSpPr>
@@ -8389,7 +9397,7 @@
       </p:sp>
       <p:sp>
         <p:nvSpPr>
-          <p:cNvPr id="9" name="Text 6"/>
+          <p:cNvPr id="12" name="Text 9"/>
           <p:cNvSpPr txBox="1"/>
           <p:nvPr/>
         </p:nvSpPr>
@@ -8428,7 +9436,7 @@
       </p:sp>
       <p:sp>
         <p:nvSpPr>
-          <p:cNvPr id="10" name="Text 7"/>
+          <p:cNvPr id="13" name="Text 10"/>
           <p:cNvSpPr txBox="1"/>
           <p:nvPr/>
         </p:nvSpPr>
@@ -8470,7 +9478,7 @@
       </p:sp>
       <p:sp>
         <p:nvSpPr>
-          <p:cNvPr id="11" name="Shape 8"/>
+          <p:cNvPr id="14" name="Shape 11"/>
           <p:cNvSpPr/>
           <p:nvPr/>
         </p:nvSpPr>
@@ -8490,7 +9498,7 @@
       </p:sp>
       <p:sp>
         <p:nvSpPr>
-          <p:cNvPr id="12" name="Shape 9"/>
+          <p:cNvPr id="15" name="Shape 12"/>
           <p:cNvSpPr/>
           <p:nvPr/>
         </p:nvSpPr>
@@ -8510,7 +9518,7 @@
       </p:sp>
       <p:sp>
         <p:nvSpPr>
-          <p:cNvPr id="13" name="Text 10"/>
+          <p:cNvPr id="16" name="Text 13"/>
           <p:cNvSpPr txBox="1"/>
           <p:nvPr/>
         </p:nvSpPr>
@@ -8549,7 +9557,7 @@
       </p:sp>
       <p:sp>
         <p:nvSpPr>
-          <p:cNvPr id="14" name="Text 11"/>
+          <p:cNvPr id="17" name="Text 14"/>
           <p:cNvSpPr txBox="1"/>
           <p:nvPr/>
         </p:nvSpPr>
@@ -8588,7 +9596,7 @@
       </p:sp>
       <p:sp>
         <p:nvSpPr>
-          <p:cNvPr id="15" name="Text 12"/>
+          <p:cNvPr id="18" name="Text 15"/>
           <p:cNvSpPr txBox="1"/>
           <p:nvPr/>
         </p:nvSpPr>
@@ -8630,7 +9638,7 @@
       </p:sp>
       <p:sp>
         <p:nvSpPr>
-          <p:cNvPr id="16" name="Shape 13"/>
+          <p:cNvPr id="19" name="Shape 16"/>
           <p:cNvSpPr/>
           <p:nvPr/>
         </p:nvSpPr>
@@ -8650,7 +9658,7 @@
       </p:sp>
       <p:sp>
         <p:nvSpPr>
-          <p:cNvPr id="17" name="Shape 14"/>
+          <p:cNvPr id="20" name="Shape 17"/>
           <p:cNvSpPr/>
           <p:nvPr/>
         </p:nvSpPr>
@@ -8670,7 +9678,7 @@
       </p:sp>
       <p:sp>
         <p:nvSpPr>
-          <p:cNvPr id="18" name="Text 15"/>
+          <p:cNvPr id="21" name="Text 18"/>
           <p:cNvSpPr txBox="1"/>
           <p:nvPr/>
         </p:nvSpPr>
@@ -8709,7 +9717,7 @@
       </p:sp>
       <p:sp>
         <p:nvSpPr>
-          <p:cNvPr id="19" name="Text 16"/>
+          <p:cNvPr id="22" name="Text 19"/>
           <p:cNvSpPr txBox="1"/>
           <p:nvPr/>
         </p:nvSpPr>
@@ -8748,7 +9756,7 @@
       </p:sp>
       <p:sp>
         <p:nvSpPr>
-          <p:cNvPr id="20" name="Text 17"/>
+          <p:cNvPr id="23" name="Text 20"/>
           <p:cNvSpPr txBox="1"/>
           <p:nvPr/>
         </p:nvSpPr>
@@ -8790,7 +9798,7 @@
       </p:sp>
       <p:sp>
         <p:nvSpPr>
-          <p:cNvPr id="21" name="Shape 18"/>
+          <p:cNvPr id="24" name="Shape 21"/>
           <p:cNvSpPr/>
           <p:nvPr/>
         </p:nvSpPr>
@@ -8810,7 +9818,7 @@
       </p:sp>
       <p:sp>
         <p:nvSpPr>
-          <p:cNvPr id="22" name="Shape 19"/>
+          <p:cNvPr id="25" name="Shape 22"/>
           <p:cNvSpPr/>
           <p:nvPr/>
         </p:nvSpPr>
@@ -8830,7 +9838,7 @@
       </p:sp>
       <p:sp>
         <p:nvSpPr>
-          <p:cNvPr id="23" name="Text 20"/>
+          <p:cNvPr id="26" name="Text 23"/>
           <p:cNvSpPr txBox="1"/>
           <p:nvPr/>
         </p:nvSpPr>
@@ -8869,7 +9877,7 @@
       </p:sp>
       <p:sp>
         <p:nvSpPr>
-          <p:cNvPr id="24" name="Text 21"/>
+          <p:cNvPr id="27" name="Text 24"/>
           <p:cNvSpPr txBox="1"/>
           <p:nvPr/>
         </p:nvSpPr>
@@ -8908,7 +9916,7 @@
       </p:sp>
       <p:sp>
         <p:nvSpPr>
-          <p:cNvPr id="25" name="Text 22"/>
+          <p:cNvPr id="28" name="Text 25"/>
           <p:cNvSpPr txBox="1"/>
           <p:nvPr/>
         </p:nvSpPr>
@@ -8950,7 +9958,7 @@
       </p:sp>
       <p:sp>
         <p:nvSpPr>
-          <p:cNvPr id="26" name="Shape 23"/>
+          <p:cNvPr id="29" name="Shape 26"/>
           <p:cNvSpPr/>
           <p:nvPr/>
         </p:nvSpPr>
@@ -8970,7 +9978,7 @@
       </p:sp>
       <p:sp>
         <p:nvSpPr>
-          <p:cNvPr id="27" name="Shape 24"/>
+          <p:cNvPr id="30" name="Shape 27"/>
           <p:cNvSpPr/>
           <p:nvPr/>
         </p:nvSpPr>
@@ -8990,7 +9998,7 @@
       </p:sp>
       <p:sp>
         <p:nvSpPr>
-          <p:cNvPr id="28" name="Text 25"/>
+          <p:cNvPr id="31" name="Text 28"/>
           <p:cNvSpPr txBox="1"/>
           <p:nvPr/>
         </p:nvSpPr>
@@ -9029,7 +10037,7 @@
       </p:sp>
       <p:sp>
         <p:nvSpPr>
-          <p:cNvPr id="29" name="Text 26"/>
+          <p:cNvPr id="32" name="Text 29"/>
           <p:cNvSpPr txBox="1"/>
           <p:nvPr/>
         </p:nvSpPr>
@@ -9068,7 +10076,7 @@
       </p:sp>
       <p:sp>
         <p:nvSpPr>
-          <p:cNvPr id="30" name="Text 27"/>
+          <p:cNvPr id="33" name="Text 30"/>
           <p:cNvSpPr txBox="1"/>
           <p:nvPr/>
         </p:nvSpPr>
@@ -9110,7 +10118,7 @@
       </p:sp>
       <p:sp>
         <p:nvSpPr>
-          <p:cNvPr id="31" name="Shape 28"/>
+          <p:cNvPr id="34" name="Shape 31"/>
           <p:cNvSpPr/>
           <p:nvPr/>
         </p:nvSpPr>
@@ -9130,7 +10138,7 @@
       </p:sp>
       <p:sp>
         <p:nvSpPr>
-          <p:cNvPr id="32" name="Shape 29"/>
+          <p:cNvPr id="35" name="Shape 32"/>
           <p:cNvSpPr/>
           <p:nvPr/>
         </p:nvSpPr>
@@ -9150,7 +10158,7 @@
       </p:sp>
       <p:sp>
         <p:nvSpPr>
-          <p:cNvPr id="33" name="Text 30"/>
+          <p:cNvPr id="36" name="Text 33"/>
           <p:cNvSpPr txBox="1"/>
           <p:nvPr/>
         </p:nvSpPr>
@@ -9189,7 +10197,7 @@
       </p:sp>
       <p:sp>
         <p:nvSpPr>
-          <p:cNvPr id="34" name="Text 31"/>
+          <p:cNvPr id="37" name="Text 34"/>
           <p:cNvSpPr txBox="1"/>
           <p:nvPr/>
         </p:nvSpPr>
@@ -9228,7 +10236,7 @@
       </p:sp>
       <p:sp>
         <p:nvSpPr>
-          <p:cNvPr id="35" name="Text 32"/>
+          <p:cNvPr id="38" name="Text 35"/>
           <p:cNvSpPr txBox="1"/>
           <p:nvPr/>
         </p:nvSpPr>
@@ -9347,6 +10355,90 @@
         </p:nvSpPr>
         <p:spPr>
           <a:xfrm>
+            <a:off x="9619488" y="182880"/>
+            <a:ext cx="2011680" cy="859536"/>
+          </a:xfrm>
+          <a:prstGeom prst="rect">
+            <a:avLst/>
+          </a:prstGeom>
+          <a:solidFill>
+            <a:srgbClr val="FFFFFF"/>
+          </a:solidFill>
+          <a:ln/>
+        </p:spPr>
+      </p:sp>
+      <p:sp>
+        <p:nvSpPr>
+          <p:cNvPr id="4" name="Shape 2"/>
+          <p:cNvSpPr/>
+          <p:nvPr/>
+        </p:nvSpPr>
+        <p:spPr>
+          <a:xfrm>
+            <a:off x="9710928" y="274320"/>
+            <a:ext cx="1828800" cy="676656"/>
+          </a:xfrm>
+          <a:prstGeom prst="rect">
+            <a:avLst/>
+          </a:prstGeom>
+          <a:solidFill>
+            <a:srgbClr val="F1F4F6"/>
+          </a:solidFill>
+          <a:ln w="12700">
+            <a:solidFill>
+              <a:srgbClr val="B6C6D0"/>
+            </a:solidFill>
+            <a:prstDash val="dash"/>
+          </a:ln>
+        </p:spPr>
+      </p:sp>
+      <p:sp>
+        <p:nvSpPr>
+          <p:cNvPr id="5" name="Text 3"/>
+          <p:cNvSpPr txBox="1"/>
+          <p:nvPr/>
+        </p:nvSpPr>
+        <p:spPr>
+          <a:xfrm>
+            <a:off x="9710928" y="274320"/>
+            <a:ext cx="1828800" cy="676656"/>
+          </a:xfrm>
+          <a:prstGeom prst="rect">
+            <a:avLst/>
+          </a:prstGeom>
+          <a:noFill/>
+          <a:ln/>
+        </p:spPr>
+        <p:txBody>
+          <a:bodyPr wrap="square" lIns="0" tIns="0" rIns="0" bIns="0" rtlCol="0" anchor="ctr"/>
+          <a:lstStyle/>
+          <a:p>
+            <a:pPr algn="ctr" indent="0" marL="0">
+              <a:buNone/>
+            </a:pPr>
+            <a:r>
+              <a:rPr lang="en-US" sz="1200" b="1" spc="200" kern="0" dirty="0">
+                <a:solidFill>
+                  <a:srgbClr val="8FA3B0"/>
+                </a:solidFill>
+                <a:latin typeface="Arial" pitchFamily="34" charset="0"/>
+                <a:ea typeface="Arial" pitchFamily="34" charset="-122"/>
+                <a:cs typeface="Arial" pitchFamily="34" charset="-120"/>
+              </a:rPr>
+              <a:t>LOGO</a:t>
+            </a:r>
+            <a:endParaRPr lang="en-US" sz="1200" dirty="0"/>
+          </a:p>
+        </p:txBody>
+      </p:sp>
+      <p:sp>
+        <p:nvSpPr>
+          <p:cNvPr id="6" name="Shape 4"/>
+          <p:cNvSpPr/>
+          <p:nvPr/>
+        </p:nvSpPr>
+        <p:spPr>
+          <a:xfrm>
             <a:off x="0" y="2148840"/>
             <a:ext cx="731520" cy="2514600"/>
           </a:xfrm>
@@ -9361,7 +10453,7 @@
       </p:sp>
       <p:sp>
         <p:nvSpPr>
-          <p:cNvPr id="4" name="Text 2"/>
+          <p:cNvPr id="7" name="Text 5"/>
           <p:cNvSpPr txBox="1"/>
           <p:nvPr/>
         </p:nvSpPr>
@@ -9400,7 +10492,7 @@
       </p:sp>
       <p:sp>
         <p:nvSpPr>
-          <p:cNvPr id="5" name="Text 3"/>
+          <p:cNvPr id="8" name="Text 6"/>
           <p:cNvSpPr txBox="1"/>
           <p:nvPr/>
         </p:nvSpPr>
@@ -9456,7 +10548,7 @@
       </p:sp>
       <p:sp>
         <p:nvSpPr>
-          <p:cNvPr id="6" name="Text 4"/>
+          <p:cNvPr id="9" name="Text 7"/>
           <p:cNvSpPr txBox="1"/>
           <p:nvPr/>
         </p:nvSpPr>
@@ -9495,7 +10587,7 @@
       </p:sp>
       <p:sp>
         <p:nvSpPr>
-          <p:cNvPr id="7" name="Shape 5"/>
+          <p:cNvPr id="10" name="Shape 8"/>
           <p:cNvSpPr/>
           <p:nvPr/>
         </p:nvSpPr>
@@ -9515,7 +10607,7 @@
       </p:sp>
       <p:pic>
         <p:nvPicPr>
-          <p:cNvPr id="8" name="Image 0" descr="preencoded.png">    </p:cNvPr>
+          <p:cNvPr id="11" name="Image 0" descr="preencoded.png">    </p:cNvPr>
           <p:cNvPicPr>
             <a:picLocks noChangeAspect="1"/>
           </p:cNvPicPr>
@@ -9616,6 +10708,90 @@
         </p:nvSpPr>
         <p:spPr>
           <a:xfrm>
+            <a:off x="9619488" y="182880"/>
+            <a:ext cx="2011680" cy="859536"/>
+          </a:xfrm>
+          <a:prstGeom prst="rect">
+            <a:avLst/>
+          </a:prstGeom>
+          <a:solidFill>
+            <a:srgbClr val="FFFFFF"/>
+          </a:solidFill>
+          <a:ln/>
+        </p:spPr>
+      </p:sp>
+      <p:sp>
+        <p:nvSpPr>
+          <p:cNvPr id="4" name="Shape 2"/>
+          <p:cNvSpPr/>
+          <p:nvPr/>
+        </p:nvSpPr>
+        <p:spPr>
+          <a:xfrm>
+            <a:off x="9710928" y="274320"/>
+            <a:ext cx="1828800" cy="676656"/>
+          </a:xfrm>
+          <a:prstGeom prst="rect">
+            <a:avLst/>
+          </a:prstGeom>
+          <a:solidFill>
+            <a:srgbClr val="F1F4F6"/>
+          </a:solidFill>
+          <a:ln w="12700">
+            <a:solidFill>
+              <a:srgbClr val="B6C6D0"/>
+            </a:solidFill>
+            <a:prstDash val="dash"/>
+          </a:ln>
+        </p:spPr>
+      </p:sp>
+      <p:sp>
+        <p:nvSpPr>
+          <p:cNvPr id="5" name="Text 3"/>
+          <p:cNvSpPr txBox="1"/>
+          <p:nvPr/>
+        </p:nvSpPr>
+        <p:spPr>
+          <a:xfrm>
+            <a:off x="9710928" y="274320"/>
+            <a:ext cx="1828800" cy="676656"/>
+          </a:xfrm>
+          <a:prstGeom prst="rect">
+            <a:avLst/>
+          </a:prstGeom>
+          <a:noFill/>
+          <a:ln/>
+        </p:spPr>
+        <p:txBody>
+          <a:bodyPr wrap="square" lIns="0" tIns="0" rIns="0" bIns="0" rtlCol="0" anchor="ctr"/>
+          <a:lstStyle/>
+          <a:p>
+            <a:pPr algn="ctr" indent="0" marL="0">
+              <a:buNone/>
+            </a:pPr>
+            <a:r>
+              <a:rPr lang="en-US" sz="1200" b="1" spc="200" kern="0" dirty="0">
+                <a:solidFill>
+                  <a:srgbClr val="8FA3B0"/>
+                </a:solidFill>
+                <a:latin typeface="Arial" pitchFamily="34" charset="0"/>
+                <a:ea typeface="Arial" pitchFamily="34" charset="-122"/>
+                <a:cs typeface="Arial" pitchFamily="34" charset="-120"/>
+              </a:rPr>
+              <a:t>LOGO</a:t>
+            </a:r>
+            <a:endParaRPr lang="en-US" sz="1200" dirty="0"/>
+          </a:p>
+        </p:txBody>
+      </p:sp>
+      <p:sp>
+        <p:nvSpPr>
+          <p:cNvPr id="6" name="Shape 4"/>
+          <p:cNvSpPr/>
+          <p:nvPr/>
+        </p:nvSpPr>
+        <p:spPr>
+          <a:xfrm>
             <a:off x="566928" y="685800"/>
             <a:ext cx="1188720" cy="1188720"/>
           </a:xfrm>
@@ -9630,7 +10806,7 @@
       </p:sp>
       <p:pic>
         <p:nvPicPr>
-          <p:cNvPr id="4" name="Image 0" descr="preencoded.png">    </p:cNvPr>
+          <p:cNvPr id="7" name="Image 0" descr="preencoded.png">    </p:cNvPr>
           <p:cNvPicPr>
             <a:picLocks noChangeAspect="1"/>
           </p:cNvPicPr>
@@ -9654,7 +10830,7 @@
       </p:pic>
       <p:sp>
         <p:nvSpPr>
-          <p:cNvPr id="5" name="Text 2"/>
+          <p:cNvPr id="8" name="Text 5"/>
           <p:cNvSpPr txBox="1"/>
           <p:nvPr/>
         </p:nvSpPr>
@@ -9693,7 +10869,7 @@
       </p:sp>
       <p:sp>
         <p:nvSpPr>
-          <p:cNvPr id="6" name="Shape 3"/>
+          <p:cNvPr id="9" name="Shape 6"/>
           <p:cNvSpPr/>
           <p:nvPr/>
         </p:nvSpPr>
@@ -9713,7 +10889,7 @@
       </p:sp>
       <p:pic>
         <p:nvPicPr>
-          <p:cNvPr id="7" name="Image 1" descr="preencoded.png">    </p:cNvPr>
+          <p:cNvPr id="10" name="Image 1" descr="preencoded.png">    </p:cNvPr>
           <p:cNvPicPr>
             <a:picLocks noChangeAspect="1"/>
           </p:cNvPicPr>
@@ -9737,7 +10913,7 @@
       </p:pic>
       <p:sp>
         <p:nvSpPr>
-          <p:cNvPr id="8" name="Text 4"/>
+          <p:cNvPr id="11" name="Text 7"/>
           <p:cNvSpPr txBox="1"/>
           <p:nvPr/>
         </p:nvSpPr>
@@ -9776,7 +10952,7 @@
       </p:sp>
       <p:sp>
         <p:nvSpPr>
-          <p:cNvPr id="9" name="Text 5"/>
+          <p:cNvPr id="12" name="Text 8"/>
           <p:cNvSpPr txBox="1"/>
           <p:nvPr/>
         </p:nvSpPr>
@@ -9838,7 +11014,7 @@
       </p:sp>
       <p:sp>
         <p:nvSpPr>
-          <p:cNvPr id="10" name="Shape 6"/>
+          <p:cNvPr id="13" name="Shape 9"/>
           <p:cNvSpPr/>
           <p:nvPr/>
         </p:nvSpPr>
@@ -9858,7 +11034,7 @@
       </p:sp>
       <p:pic>
         <p:nvPicPr>
-          <p:cNvPr id="11" name="Image 2" descr="preencoded.png">    </p:cNvPr>
+          <p:cNvPr id="14" name="Image 2" descr="preencoded.png">    </p:cNvPr>
           <p:cNvPicPr>
             <a:picLocks noChangeAspect="1"/>
           </p:cNvPicPr>
@@ -9882,7 +11058,7 @@
       </p:pic>
       <p:sp>
         <p:nvSpPr>
-          <p:cNvPr id="12" name="Text 7"/>
+          <p:cNvPr id="15" name="Text 10"/>
           <p:cNvSpPr txBox="1"/>
           <p:nvPr/>
         </p:nvSpPr>
@@ -9921,7 +11097,7 @@
       </p:sp>
       <p:sp>
         <p:nvSpPr>
-          <p:cNvPr id="13" name="Text 8"/>
+          <p:cNvPr id="16" name="Text 11"/>
           <p:cNvSpPr txBox="1"/>
           <p:nvPr/>
         </p:nvSpPr>
@@ -9983,7 +11159,7 @@
       </p:sp>
       <p:sp>
         <p:nvSpPr>
-          <p:cNvPr id="14" name="Shape 9"/>
+          <p:cNvPr id="17" name="Shape 12"/>
           <p:cNvSpPr/>
           <p:nvPr/>
         </p:nvSpPr>
@@ -10003,7 +11179,7 @@
       </p:sp>
       <p:pic>
         <p:nvPicPr>
-          <p:cNvPr id="15" name="Image 3" descr="preencoded.png">    </p:cNvPr>
+          <p:cNvPr id="18" name="Image 3" descr="preencoded.png">    </p:cNvPr>
           <p:cNvPicPr>
             <a:picLocks noChangeAspect="1"/>
           </p:cNvPicPr>
@@ -10027,7 +11203,7 @@
       </p:pic>
       <p:sp>
         <p:nvSpPr>
-          <p:cNvPr id="16" name="Text 10"/>
+          <p:cNvPr id="19" name="Text 13"/>
           <p:cNvSpPr txBox="1"/>
           <p:nvPr/>
         </p:nvSpPr>
@@ -10066,7 +11242,7 @@
       </p:sp>
       <p:sp>
         <p:nvSpPr>
-          <p:cNvPr id="17" name="Text 11"/>
+          <p:cNvPr id="20" name="Text 14"/>
           <p:cNvSpPr txBox="1"/>
           <p:nvPr/>
         </p:nvSpPr>
@@ -10128,7 +11304,7 @@
       </p:sp>
       <p:sp>
         <p:nvSpPr>
-          <p:cNvPr id="18" name="Shape 12"/>
+          <p:cNvPr id="21" name="Shape 15"/>
           <p:cNvSpPr/>
           <p:nvPr/>
         </p:nvSpPr>
@@ -10148,7 +11324,7 @@
       </p:sp>
       <p:pic>
         <p:nvPicPr>
-          <p:cNvPr id="19" name="Image 4" descr="preencoded.png">    </p:cNvPr>
+          <p:cNvPr id="22" name="Image 4" descr="preencoded.png">    </p:cNvPr>
           <p:cNvPicPr>
             <a:picLocks noChangeAspect="1"/>
           </p:cNvPicPr>
@@ -10172,7 +11348,7 @@
       </p:pic>
       <p:sp>
         <p:nvSpPr>
-          <p:cNvPr id="20" name="Text 13"/>
+          <p:cNvPr id="23" name="Text 16"/>
           <p:cNvSpPr txBox="1"/>
           <p:nvPr/>
         </p:nvSpPr>
@@ -10211,7 +11387,7 @@
       </p:sp>
       <p:sp>
         <p:nvSpPr>
-          <p:cNvPr id="21" name="Text 14"/>
+          <p:cNvPr id="24" name="Text 17"/>
           <p:cNvSpPr txBox="1"/>
           <p:nvPr/>
         </p:nvSpPr>
@@ -10350,6 +11526,90 @@
         </p:nvSpPr>
         <p:spPr>
           <a:xfrm>
+            <a:off x="9619488" y="182880"/>
+            <a:ext cx="2011680" cy="859536"/>
+          </a:xfrm>
+          <a:prstGeom prst="rect">
+            <a:avLst/>
+          </a:prstGeom>
+          <a:solidFill>
+            <a:srgbClr val="FFFFFF"/>
+          </a:solidFill>
+          <a:ln/>
+        </p:spPr>
+      </p:sp>
+      <p:sp>
+        <p:nvSpPr>
+          <p:cNvPr id="4" name="Shape 2"/>
+          <p:cNvSpPr/>
+          <p:nvPr/>
+        </p:nvSpPr>
+        <p:spPr>
+          <a:xfrm>
+            <a:off x="9710928" y="274320"/>
+            <a:ext cx="1828800" cy="676656"/>
+          </a:xfrm>
+          <a:prstGeom prst="rect">
+            <a:avLst/>
+          </a:prstGeom>
+          <a:solidFill>
+            <a:srgbClr val="F1F4F6"/>
+          </a:solidFill>
+          <a:ln w="12700">
+            <a:solidFill>
+              <a:srgbClr val="B6C6D0"/>
+            </a:solidFill>
+            <a:prstDash val="dash"/>
+          </a:ln>
+        </p:spPr>
+      </p:sp>
+      <p:sp>
+        <p:nvSpPr>
+          <p:cNvPr id="5" name="Text 3"/>
+          <p:cNvSpPr txBox="1"/>
+          <p:nvPr/>
+        </p:nvSpPr>
+        <p:spPr>
+          <a:xfrm>
+            <a:off x="9710928" y="274320"/>
+            <a:ext cx="1828800" cy="676656"/>
+          </a:xfrm>
+          <a:prstGeom prst="rect">
+            <a:avLst/>
+          </a:prstGeom>
+          <a:noFill/>
+          <a:ln/>
+        </p:spPr>
+        <p:txBody>
+          <a:bodyPr wrap="square" lIns="0" tIns="0" rIns="0" bIns="0" rtlCol="0" anchor="ctr"/>
+          <a:lstStyle/>
+          <a:p>
+            <a:pPr algn="ctr" indent="0" marL="0">
+              <a:buNone/>
+            </a:pPr>
+            <a:r>
+              <a:rPr lang="en-US" sz="1200" b="1" spc="200" kern="0" dirty="0">
+                <a:solidFill>
+                  <a:srgbClr val="8FA3B0"/>
+                </a:solidFill>
+                <a:latin typeface="Arial" pitchFamily="34" charset="0"/>
+                <a:ea typeface="Arial" pitchFamily="34" charset="-122"/>
+                <a:cs typeface="Arial" pitchFamily="34" charset="-120"/>
+              </a:rPr>
+              <a:t>LOGO</a:t>
+            </a:r>
+            <a:endParaRPr lang="en-US" sz="1200" dirty="0"/>
+          </a:p>
+        </p:txBody>
+      </p:sp>
+      <p:sp>
+        <p:nvSpPr>
+          <p:cNvPr id="6" name="Shape 4"/>
+          <p:cNvSpPr/>
+          <p:nvPr/>
+        </p:nvSpPr>
+        <p:spPr>
+          <a:xfrm>
             <a:off x="566928" y="685800"/>
             <a:ext cx="1188720" cy="1188720"/>
           </a:xfrm>
@@ -10364,7 +11624,7 @@
       </p:sp>
       <p:pic>
         <p:nvPicPr>
-          <p:cNvPr id="4" name="Image 0" descr="preencoded.png">    </p:cNvPr>
+          <p:cNvPr id="7" name="Image 0" descr="preencoded.png">    </p:cNvPr>
           <p:cNvPicPr>
             <a:picLocks noChangeAspect="1"/>
           </p:cNvPicPr>
@@ -10388,7 +11648,7 @@
       </p:pic>
       <p:sp>
         <p:nvSpPr>
-          <p:cNvPr id="5" name="Text 2"/>
+          <p:cNvPr id="8" name="Text 5"/>
           <p:cNvSpPr txBox="1"/>
           <p:nvPr/>
         </p:nvSpPr>
@@ -10427,7 +11687,7 @@
       </p:sp>
       <p:sp>
         <p:nvSpPr>
-          <p:cNvPr id="6" name="Text 3"/>
+          <p:cNvPr id="9" name="Text 6"/>
           <p:cNvSpPr txBox="1"/>
           <p:nvPr/>
         </p:nvSpPr>
@@ -10466,7 +11726,7 @@
       </p:sp>
       <p:sp>
         <p:nvSpPr>
-          <p:cNvPr id="7" name="Text 4"/>
+          <p:cNvPr id="10" name="Text 7"/>
           <p:cNvSpPr txBox="1"/>
           <p:nvPr/>
         </p:nvSpPr>
@@ -10505,7 +11765,7 @@
       </p:sp>
       <p:sp>
         <p:nvSpPr>
-          <p:cNvPr id="8" name="Text 5"/>
+          <p:cNvPr id="11" name="Text 8"/>
           <p:cNvSpPr txBox="1"/>
           <p:nvPr/>
         </p:nvSpPr>
@@ -10544,7 +11804,7 @@
       </p:sp>
       <p:sp>
         <p:nvSpPr>
-          <p:cNvPr id="9" name="Text 6"/>
+          <p:cNvPr id="12" name="Text 9"/>
           <p:cNvSpPr txBox="1"/>
           <p:nvPr/>
         </p:nvSpPr>
@@ -10583,7 +11843,7 @@
       </p:sp>
       <p:sp>
         <p:nvSpPr>
-          <p:cNvPr id="10" name="Text 7"/>
+          <p:cNvPr id="13" name="Text 10"/>
           <p:cNvSpPr txBox="1"/>
           <p:nvPr/>
         </p:nvSpPr>
@@ -10622,7 +11882,7 @@
       </p:sp>
       <p:sp>
         <p:nvSpPr>
-          <p:cNvPr id="11" name="Text 8"/>
+          <p:cNvPr id="14" name="Text 11"/>
           <p:cNvSpPr txBox="1"/>
           <p:nvPr/>
         </p:nvSpPr>
@@ -10661,7 +11921,7 @@
       </p:sp>
       <p:sp>
         <p:nvSpPr>
-          <p:cNvPr id="12" name="Shape 9"/>
+          <p:cNvPr id="15" name="Shape 12"/>
           <p:cNvSpPr/>
           <p:nvPr/>
         </p:nvSpPr>
@@ -10681,7 +11941,7 @@
       </p:sp>
       <p:sp>
         <p:nvSpPr>
-          <p:cNvPr id="13" name="Text 10"/>
+          <p:cNvPr id="16" name="Text 13"/>
           <p:cNvSpPr txBox="1"/>
           <p:nvPr/>
         </p:nvSpPr>
@@ -10720,7 +11980,7 @@
       </p:sp>
       <p:sp>
         <p:nvSpPr>
-          <p:cNvPr id="14" name="Text 11"/>
+          <p:cNvPr id="17" name="Text 14"/>
           <p:cNvSpPr txBox="1"/>
           <p:nvPr/>
         </p:nvSpPr>
@@ -10759,7 +12019,7 @@
       </p:sp>
       <p:sp>
         <p:nvSpPr>
-          <p:cNvPr id="15" name="Shape 12"/>
+          <p:cNvPr id="18" name="Shape 15"/>
           <p:cNvSpPr/>
           <p:nvPr/>
         </p:nvSpPr>
@@ -10779,7 +12039,7 @@
       </p:sp>
       <p:sp>
         <p:nvSpPr>
-          <p:cNvPr id="16" name="Text 13"/>
+          <p:cNvPr id="19" name="Text 16"/>
           <p:cNvSpPr txBox="1"/>
           <p:nvPr/>
         </p:nvSpPr>
@@ -10818,7 +12078,7 @@
       </p:sp>
       <p:sp>
         <p:nvSpPr>
-          <p:cNvPr id="17" name="Text 14"/>
+          <p:cNvPr id="20" name="Text 17"/>
           <p:cNvSpPr txBox="1"/>
           <p:nvPr/>
         </p:nvSpPr>
@@ -10857,7 +12117,7 @@
       </p:sp>
       <p:sp>
         <p:nvSpPr>
-          <p:cNvPr id="18" name="Text 15"/>
+          <p:cNvPr id="21" name="Text 18"/>
           <p:cNvSpPr txBox="1"/>
           <p:nvPr/>
         </p:nvSpPr>
@@ -10973,6 +12233,90 @@
         </p:nvSpPr>
         <p:spPr>
           <a:xfrm>
+            <a:off x="9619488" y="182880"/>
+            <a:ext cx="2011680" cy="859536"/>
+          </a:xfrm>
+          <a:prstGeom prst="rect">
+            <a:avLst/>
+          </a:prstGeom>
+          <a:solidFill>
+            <a:srgbClr val="FFFFFF"/>
+          </a:solidFill>
+          <a:ln/>
+        </p:spPr>
+      </p:sp>
+      <p:sp>
+        <p:nvSpPr>
+          <p:cNvPr id="4" name="Shape 2"/>
+          <p:cNvSpPr/>
+          <p:nvPr/>
+        </p:nvSpPr>
+        <p:spPr>
+          <a:xfrm>
+            <a:off x="9710928" y="274320"/>
+            <a:ext cx="1828800" cy="676656"/>
+          </a:xfrm>
+          <a:prstGeom prst="rect">
+            <a:avLst/>
+          </a:prstGeom>
+          <a:solidFill>
+            <a:srgbClr val="F1F4F6"/>
+          </a:solidFill>
+          <a:ln w="12700">
+            <a:solidFill>
+              <a:srgbClr val="B6C6D0"/>
+            </a:solidFill>
+            <a:prstDash val="dash"/>
+          </a:ln>
+        </p:spPr>
+      </p:sp>
+      <p:sp>
+        <p:nvSpPr>
+          <p:cNvPr id="5" name="Text 3"/>
+          <p:cNvSpPr txBox="1"/>
+          <p:nvPr/>
+        </p:nvSpPr>
+        <p:spPr>
+          <a:xfrm>
+            <a:off x="9710928" y="274320"/>
+            <a:ext cx="1828800" cy="676656"/>
+          </a:xfrm>
+          <a:prstGeom prst="rect">
+            <a:avLst/>
+          </a:prstGeom>
+          <a:noFill/>
+          <a:ln/>
+        </p:spPr>
+        <p:txBody>
+          <a:bodyPr wrap="square" lIns="0" tIns="0" rIns="0" bIns="0" rtlCol="0" anchor="ctr"/>
+          <a:lstStyle/>
+          <a:p>
+            <a:pPr algn="ctr" indent="0" marL="0">
+              <a:buNone/>
+            </a:pPr>
+            <a:r>
+              <a:rPr lang="en-US" sz="1200" b="1" spc="200" kern="0" dirty="0">
+                <a:solidFill>
+                  <a:srgbClr val="8FA3B0"/>
+                </a:solidFill>
+                <a:latin typeface="Arial" pitchFamily="34" charset="0"/>
+                <a:ea typeface="Arial" pitchFamily="34" charset="-122"/>
+                <a:cs typeface="Arial" pitchFamily="34" charset="-120"/>
+              </a:rPr>
+              <a:t>LOGO</a:t>
+            </a:r>
+            <a:endParaRPr lang="en-US" sz="1200" dirty="0"/>
+          </a:p>
+        </p:txBody>
+      </p:sp>
+      <p:sp>
+        <p:nvSpPr>
+          <p:cNvPr id="6" name="Shape 4"/>
+          <p:cNvSpPr/>
+          <p:nvPr/>
+        </p:nvSpPr>
+        <p:spPr>
+          <a:xfrm>
             <a:off x="566928" y="685800"/>
             <a:ext cx="1188720" cy="1188720"/>
           </a:xfrm>
@@ -10987,7 +12331,7 @@
       </p:sp>
       <p:pic>
         <p:nvPicPr>
-          <p:cNvPr id="4" name="Image 0" descr="preencoded.png">    </p:cNvPr>
+          <p:cNvPr id="7" name="Image 0" descr="preencoded.png">    </p:cNvPr>
           <p:cNvPicPr>
             <a:picLocks noChangeAspect="1"/>
           </p:cNvPicPr>
@@ -11011,7 +12355,7 @@
       </p:pic>
       <p:sp>
         <p:nvSpPr>
-          <p:cNvPr id="5" name="Text 2"/>
+          <p:cNvPr id="8" name="Text 5"/>
           <p:cNvSpPr txBox="1"/>
           <p:nvPr/>
         </p:nvSpPr>
@@ -11050,7 +12394,7 @@
       </p:sp>
       <p:sp>
         <p:nvSpPr>
-          <p:cNvPr id="6" name="Text 3"/>
+          <p:cNvPr id="9" name="Text 6"/>
           <p:cNvSpPr txBox="1"/>
           <p:nvPr/>
         </p:nvSpPr>
@@ -11089,7 +12433,7 @@
       </p:sp>
       <p:sp>
         <p:nvSpPr>
-          <p:cNvPr id="7" name="Text 4"/>
+          <p:cNvPr id="10" name="Text 7"/>
           <p:cNvSpPr txBox="1"/>
           <p:nvPr/>
         </p:nvSpPr>
@@ -11128,7 +12472,7 @@
       </p:sp>
       <p:sp>
         <p:nvSpPr>
-          <p:cNvPr id="8" name="Text 5"/>
+          <p:cNvPr id="11" name="Text 8"/>
           <p:cNvSpPr txBox="1"/>
           <p:nvPr/>
         </p:nvSpPr>
@@ -11167,7 +12511,7 @@
       </p:sp>
       <p:sp>
         <p:nvSpPr>
-          <p:cNvPr id="9" name="Text 6"/>
+          <p:cNvPr id="12" name="Text 9"/>
           <p:cNvSpPr txBox="1"/>
           <p:nvPr/>
         </p:nvSpPr>
@@ -11206,7 +12550,7 @@
       </p:sp>
       <p:sp>
         <p:nvSpPr>
-          <p:cNvPr id="10" name="Shape 7"/>
+          <p:cNvPr id="13" name="Shape 10"/>
           <p:cNvSpPr/>
           <p:nvPr/>
         </p:nvSpPr>
@@ -11226,7 +12570,7 @@
       </p:sp>
       <p:sp>
         <p:nvSpPr>
-          <p:cNvPr id="11" name="Shape 8"/>
+          <p:cNvPr id="14" name="Shape 11"/>
           <p:cNvSpPr/>
           <p:nvPr/>
         </p:nvSpPr>
@@ -11246,7 +12590,7 @@
       </p:sp>
       <p:sp>
         <p:nvSpPr>
-          <p:cNvPr id="12" name="Text 9"/>
+          <p:cNvPr id="15" name="Text 12"/>
           <p:cNvSpPr txBox="1"/>
           <p:nvPr/>
         </p:nvSpPr>
@@ -11285,7 +12629,7 @@
       </p:sp>
       <p:sp>
         <p:nvSpPr>
-          <p:cNvPr id="13" name="Text 10"/>
+          <p:cNvPr id="16" name="Text 13"/>
           <p:cNvSpPr txBox="1"/>
           <p:nvPr/>
         </p:nvSpPr>
@@ -11324,7 +12668,7 @@
       </p:sp>
       <p:sp>
         <p:nvSpPr>
-          <p:cNvPr id="14" name="Text 11"/>
+          <p:cNvPr id="17" name="Text 14"/>
           <p:cNvSpPr txBox="1"/>
           <p:nvPr/>
         </p:nvSpPr>
@@ -11639,6 +12983,90 @@
           </a:p>
         </p:txBody>
       </p:sp>
+      <p:sp>
+        <p:nvSpPr>
+          <p:cNvPr id="9" name="Shape 6"/>
+          <p:cNvSpPr/>
+          <p:nvPr/>
+        </p:nvSpPr>
+        <p:spPr>
+          <a:xfrm>
+            <a:off x="9619488" y="182880"/>
+            <a:ext cx="2011680" cy="859536"/>
+          </a:xfrm>
+          <a:prstGeom prst="rect">
+            <a:avLst/>
+          </a:prstGeom>
+          <a:solidFill>
+            <a:srgbClr val="FFFFFF"/>
+          </a:solidFill>
+          <a:ln/>
+        </p:spPr>
+      </p:sp>
+      <p:sp>
+        <p:nvSpPr>
+          <p:cNvPr id="10" name="Shape 7"/>
+          <p:cNvSpPr/>
+          <p:nvPr/>
+        </p:nvSpPr>
+        <p:spPr>
+          <a:xfrm>
+            <a:off x="9710928" y="274320"/>
+            <a:ext cx="1828800" cy="676656"/>
+          </a:xfrm>
+          <a:prstGeom prst="rect">
+            <a:avLst/>
+          </a:prstGeom>
+          <a:solidFill>
+            <a:srgbClr val="F1F4F6"/>
+          </a:solidFill>
+          <a:ln w="12700">
+            <a:solidFill>
+              <a:srgbClr val="B6C6D0"/>
+            </a:solidFill>
+            <a:prstDash val="dash"/>
+          </a:ln>
+        </p:spPr>
+      </p:sp>
+      <p:sp>
+        <p:nvSpPr>
+          <p:cNvPr id="11" name="Text 8"/>
+          <p:cNvSpPr txBox="1"/>
+          <p:nvPr/>
+        </p:nvSpPr>
+        <p:spPr>
+          <a:xfrm>
+            <a:off x="9710928" y="274320"/>
+            <a:ext cx="1828800" cy="676656"/>
+          </a:xfrm>
+          <a:prstGeom prst="rect">
+            <a:avLst/>
+          </a:prstGeom>
+          <a:noFill/>
+          <a:ln/>
+        </p:spPr>
+        <p:txBody>
+          <a:bodyPr wrap="square" lIns="0" tIns="0" rIns="0" bIns="0" rtlCol="0" anchor="ctr"/>
+          <a:lstStyle/>
+          <a:p>
+            <a:pPr algn="ctr" indent="0" marL="0">
+              <a:buNone/>
+            </a:pPr>
+            <a:r>
+              <a:rPr lang="en-US" sz="1200" b="1" spc="200" kern="0" dirty="0">
+                <a:solidFill>
+                  <a:srgbClr val="8FA3B0"/>
+                </a:solidFill>
+                <a:latin typeface="Arial" pitchFamily="34" charset="0"/>
+                <a:ea typeface="Arial" pitchFamily="34" charset="-122"/>
+                <a:cs typeface="Arial" pitchFamily="34" charset="-120"/>
+              </a:rPr>
+              <a:t>LOGO</a:t>
+            </a:r>
+            <a:endParaRPr lang="en-US" sz="1200" dirty="0"/>
+          </a:p>
+        </p:txBody>
+      </p:sp>
     </p:spTree>
   </p:cSld>
   <p:clrMapOvr>
@@ -11718,6 +13146,90 @@
         </p:nvSpPr>
         <p:spPr>
           <a:xfrm>
+            <a:off x="9619488" y="182880"/>
+            <a:ext cx="2011680" cy="859536"/>
+          </a:xfrm>
+          <a:prstGeom prst="rect">
+            <a:avLst/>
+          </a:prstGeom>
+          <a:solidFill>
+            <a:srgbClr val="FFFFFF"/>
+          </a:solidFill>
+          <a:ln/>
+        </p:spPr>
+      </p:sp>
+      <p:sp>
+        <p:nvSpPr>
+          <p:cNvPr id="4" name="Shape 2"/>
+          <p:cNvSpPr/>
+          <p:nvPr/>
+        </p:nvSpPr>
+        <p:spPr>
+          <a:xfrm>
+            <a:off x="9710928" y="274320"/>
+            <a:ext cx="1828800" cy="676656"/>
+          </a:xfrm>
+          <a:prstGeom prst="rect">
+            <a:avLst/>
+          </a:prstGeom>
+          <a:solidFill>
+            <a:srgbClr val="F1F4F6"/>
+          </a:solidFill>
+          <a:ln w="12700">
+            <a:solidFill>
+              <a:srgbClr val="B6C6D0"/>
+            </a:solidFill>
+            <a:prstDash val="dash"/>
+          </a:ln>
+        </p:spPr>
+      </p:sp>
+      <p:sp>
+        <p:nvSpPr>
+          <p:cNvPr id="5" name="Text 3"/>
+          <p:cNvSpPr txBox="1"/>
+          <p:nvPr/>
+        </p:nvSpPr>
+        <p:spPr>
+          <a:xfrm>
+            <a:off x="9710928" y="274320"/>
+            <a:ext cx="1828800" cy="676656"/>
+          </a:xfrm>
+          <a:prstGeom prst="rect">
+            <a:avLst/>
+          </a:prstGeom>
+          <a:noFill/>
+          <a:ln/>
+        </p:spPr>
+        <p:txBody>
+          <a:bodyPr wrap="square" lIns="0" tIns="0" rIns="0" bIns="0" rtlCol="0" anchor="ctr"/>
+          <a:lstStyle/>
+          <a:p>
+            <a:pPr algn="ctr" indent="0" marL="0">
+              <a:buNone/>
+            </a:pPr>
+            <a:r>
+              <a:rPr lang="en-US" sz="1200" b="1" spc="200" kern="0" dirty="0">
+                <a:solidFill>
+                  <a:srgbClr val="8FA3B0"/>
+                </a:solidFill>
+                <a:latin typeface="Arial" pitchFamily="34" charset="0"/>
+                <a:ea typeface="Arial" pitchFamily="34" charset="-122"/>
+                <a:cs typeface="Arial" pitchFamily="34" charset="-120"/>
+              </a:rPr>
+              <a:t>LOGO</a:t>
+            </a:r>
+            <a:endParaRPr lang="en-US" sz="1200" dirty="0"/>
+          </a:p>
+        </p:txBody>
+      </p:sp>
+      <p:sp>
+        <p:nvSpPr>
+          <p:cNvPr id="6" name="Shape 4"/>
+          <p:cNvSpPr/>
+          <p:nvPr/>
+        </p:nvSpPr>
+        <p:spPr>
+          <a:xfrm>
             <a:off x="566928" y="685800"/>
             <a:ext cx="1188720" cy="1188720"/>
           </a:xfrm>
@@ -11732,7 +13244,7 @@
       </p:sp>
       <p:pic>
         <p:nvPicPr>
-          <p:cNvPr id="4" name="Image 0" descr="preencoded.png">    </p:cNvPr>
+          <p:cNvPr id="7" name="Image 0" descr="preencoded.png">    </p:cNvPr>
           <p:cNvPicPr>
             <a:picLocks noChangeAspect="1"/>
           </p:cNvPicPr>
@@ -11756,7 +13268,7 @@
       </p:pic>
       <p:sp>
         <p:nvSpPr>
-          <p:cNvPr id="5" name="Text 2"/>
+          <p:cNvPr id="8" name="Text 5"/>
           <p:cNvSpPr txBox="1"/>
           <p:nvPr/>
         </p:nvSpPr>
@@ -11795,7 +13307,7 @@
       </p:sp>
       <p:sp>
         <p:nvSpPr>
-          <p:cNvPr id="6" name="Shape 3"/>
+          <p:cNvPr id="9" name="Shape 6"/>
           <p:cNvSpPr/>
           <p:nvPr/>
         </p:nvSpPr>
@@ -11815,7 +13327,7 @@
       </p:sp>
       <p:sp>
         <p:nvSpPr>
-          <p:cNvPr id="7" name="Text 4"/>
+          <p:cNvPr id="10" name="Text 7"/>
           <p:cNvSpPr txBox="1"/>
           <p:nvPr/>
         </p:nvSpPr>
@@ -11871,7 +13383,7 @@
       </p:sp>
       <p:sp>
         <p:nvSpPr>
-          <p:cNvPr id="8" name="Text 5"/>
+          <p:cNvPr id="11" name="Text 8"/>
           <p:cNvSpPr txBox="1"/>
           <p:nvPr/>
         </p:nvSpPr>
@@ -11933,7 +13445,7 @@
       </p:sp>
       <p:sp>
         <p:nvSpPr>
-          <p:cNvPr id="9" name="Text 6"/>
+          <p:cNvPr id="12" name="Text 9"/>
           <p:cNvSpPr txBox="1"/>
           <p:nvPr/>
         </p:nvSpPr>
@@ -11972,7 +13484,7 @@
       </p:sp>
       <p:sp>
         <p:nvSpPr>
-          <p:cNvPr id="10" name="Shape 7"/>
+          <p:cNvPr id="13" name="Shape 10"/>
           <p:cNvSpPr/>
           <p:nvPr/>
         </p:nvSpPr>
@@ -11992,7 +13504,7 @@
       </p:sp>
       <p:sp>
         <p:nvSpPr>
-          <p:cNvPr id="11" name="Text 8"/>
+          <p:cNvPr id="14" name="Text 11"/>
           <p:cNvSpPr txBox="1"/>
           <p:nvPr/>
         </p:nvSpPr>
@@ -12048,7 +13560,7 @@
       </p:sp>
       <p:sp>
         <p:nvSpPr>
-          <p:cNvPr id="12" name="Text 9"/>
+          <p:cNvPr id="15" name="Text 12"/>
           <p:cNvSpPr txBox="1"/>
           <p:nvPr/>
         </p:nvSpPr>
@@ -12110,7 +13622,7 @@
       </p:sp>
       <p:sp>
         <p:nvSpPr>
-          <p:cNvPr id="13" name="Text 10"/>
+          <p:cNvPr id="16" name="Text 13"/>
           <p:cNvSpPr txBox="1"/>
           <p:nvPr/>
         </p:nvSpPr>
@@ -12149,7 +13661,7 @@
       </p:sp>
       <p:sp>
         <p:nvSpPr>
-          <p:cNvPr id="14" name="Shape 11"/>
+          <p:cNvPr id="17" name="Shape 14"/>
           <p:cNvSpPr/>
           <p:nvPr/>
         </p:nvSpPr>
@@ -12169,7 +13681,7 @@
       </p:sp>
       <p:sp>
         <p:nvSpPr>
-          <p:cNvPr id="15" name="Text 12"/>
+          <p:cNvPr id="18" name="Text 15"/>
           <p:cNvSpPr txBox="1"/>
           <p:nvPr/>
         </p:nvSpPr>
@@ -12225,7 +13737,7 @@
       </p:sp>
       <p:sp>
         <p:nvSpPr>
-          <p:cNvPr id="16" name="Text 13"/>
+          <p:cNvPr id="19" name="Text 16"/>
           <p:cNvSpPr txBox="1"/>
           <p:nvPr/>
         </p:nvSpPr>
@@ -12287,7 +13799,7 @@
       </p:sp>
       <p:sp>
         <p:nvSpPr>
-          <p:cNvPr id="17" name="Text 14"/>
+          <p:cNvPr id="20" name="Text 17"/>
           <p:cNvSpPr txBox="1"/>
           <p:nvPr/>
         </p:nvSpPr>
@@ -12462,6 +13974,90 @@
         </p:nvSpPr>
         <p:spPr>
           <a:xfrm>
+            <a:off x="9619488" y="182880"/>
+            <a:ext cx="2011680" cy="859536"/>
+          </a:xfrm>
+          <a:prstGeom prst="rect">
+            <a:avLst/>
+          </a:prstGeom>
+          <a:solidFill>
+            <a:srgbClr val="FFFFFF"/>
+          </a:solidFill>
+          <a:ln/>
+        </p:spPr>
+      </p:sp>
+      <p:sp>
+        <p:nvSpPr>
+          <p:cNvPr id="6" name="Shape 4"/>
+          <p:cNvSpPr/>
+          <p:nvPr/>
+        </p:nvSpPr>
+        <p:spPr>
+          <a:xfrm>
+            <a:off x="9710928" y="274320"/>
+            <a:ext cx="1828800" cy="676656"/>
+          </a:xfrm>
+          <a:prstGeom prst="rect">
+            <a:avLst/>
+          </a:prstGeom>
+          <a:solidFill>
+            <a:srgbClr val="F1F4F6"/>
+          </a:solidFill>
+          <a:ln w="12700">
+            <a:solidFill>
+              <a:srgbClr val="B6C6D0"/>
+            </a:solidFill>
+            <a:prstDash val="dash"/>
+          </a:ln>
+        </p:spPr>
+      </p:sp>
+      <p:sp>
+        <p:nvSpPr>
+          <p:cNvPr id="7" name="Text 5"/>
+          <p:cNvSpPr txBox="1"/>
+          <p:nvPr/>
+        </p:nvSpPr>
+        <p:spPr>
+          <a:xfrm>
+            <a:off x="9710928" y="274320"/>
+            <a:ext cx="1828800" cy="676656"/>
+          </a:xfrm>
+          <a:prstGeom prst="rect">
+            <a:avLst/>
+          </a:prstGeom>
+          <a:noFill/>
+          <a:ln/>
+        </p:spPr>
+        <p:txBody>
+          <a:bodyPr wrap="square" lIns="0" tIns="0" rIns="0" bIns="0" rtlCol="0" anchor="ctr"/>
+          <a:lstStyle/>
+          <a:p>
+            <a:pPr algn="ctr" indent="0" marL="0">
+              <a:buNone/>
+            </a:pPr>
+            <a:r>
+              <a:rPr lang="en-US" sz="1200" b="1" spc="200" kern="0" dirty="0">
+                <a:solidFill>
+                  <a:srgbClr val="8FA3B0"/>
+                </a:solidFill>
+                <a:latin typeface="Arial" pitchFamily="34" charset="0"/>
+                <a:ea typeface="Arial" pitchFamily="34" charset="-122"/>
+                <a:cs typeface="Arial" pitchFamily="34" charset="-120"/>
+              </a:rPr>
+              <a:t>LOGO</a:t>
+            </a:r>
+            <a:endParaRPr lang="en-US" sz="1200" dirty="0"/>
+          </a:p>
+        </p:txBody>
+      </p:sp>
+      <p:sp>
+        <p:nvSpPr>
+          <p:cNvPr id="8" name="Shape 6"/>
+          <p:cNvSpPr/>
+          <p:nvPr/>
+        </p:nvSpPr>
+        <p:spPr>
+          <a:xfrm>
             <a:off x="9646920" y="1143000"/>
             <a:ext cx="1920240" cy="1920240"/>
           </a:xfrm>
@@ -12476,7 +14072,7 @@
       </p:sp>
       <p:pic>
         <p:nvPicPr>
-          <p:cNvPr id="6" name="Image 0" descr="preencoded.png">    </p:cNvPr>
+          <p:cNvPr id="9" name="Image 0" descr="preencoded.png">    </p:cNvPr>
           <p:cNvPicPr>
             <a:picLocks noChangeAspect="1"/>
           </p:cNvPicPr>
@@ -12500,7 +14096,7 @@
       </p:pic>
       <p:sp>
         <p:nvSpPr>
-          <p:cNvPr id="7" name="Text 4"/>
+          <p:cNvPr id="10" name="Text 7"/>
           <p:cNvSpPr txBox="1"/>
           <p:nvPr/>
         </p:nvSpPr>
@@ -13221,6 +14817,90 @@
         </p:nvSpPr>
         <p:spPr>
           <a:xfrm>
+            <a:off x="9619488" y="182880"/>
+            <a:ext cx="2011680" cy="859536"/>
+          </a:xfrm>
+          <a:prstGeom prst="rect">
+            <a:avLst/>
+          </a:prstGeom>
+          <a:solidFill>
+            <a:srgbClr val="FFFFFF"/>
+          </a:solidFill>
+          <a:ln/>
+        </p:spPr>
+      </p:sp>
+      <p:sp>
+        <p:nvSpPr>
+          <p:cNvPr id="4" name="Shape 2"/>
+          <p:cNvSpPr/>
+          <p:nvPr/>
+        </p:nvSpPr>
+        <p:spPr>
+          <a:xfrm>
+            <a:off x="9710928" y="274320"/>
+            <a:ext cx="1828800" cy="676656"/>
+          </a:xfrm>
+          <a:prstGeom prst="rect">
+            <a:avLst/>
+          </a:prstGeom>
+          <a:solidFill>
+            <a:srgbClr val="F1F4F6"/>
+          </a:solidFill>
+          <a:ln w="12700">
+            <a:solidFill>
+              <a:srgbClr val="B6C6D0"/>
+            </a:solidFill>
+            <a:prstDash val="dash"/>
+          </a:ln>
+        </p:spPr>
+      </p:sp>
+      <p:sp>
+        <p:nvSpPr>
+          <p:cNvPr id="5" name="Text 3"/>
+          <p:cNvSpPr txBox="1"/>
+          <p:nvPr/>
+        </p:nvSpPr>
+        <p:spPr>
+          <a:xfrm>
+            <a:off x="9710928" y="274320"/>
+            <a:ext cx="1828800" cy="676656"/>
+          </a:xfrm>
+          <a:prstGeom prst="rect">
+            <a:avLst/>
+          </a:prstGeom>
+          <a:noFill/>
+          <a:ln/>
+        </p:spPr>
+        <p:txBody>
+          <a:bodyPr wrap="square" lIns="0" tIns="0" rIns="0" bIns="0" rtlCol="0" anchor="ctr"/>
+          <a:lstStyle/>
+          <a:p>
+            <a:pPr algn="ctr" indent="0" marL="0">
+              <a:buNone/>
+            </a:pPr>
+            <a:r>
+              <a:rPr lang="en-US" sz="1200" b="1" spc="200" kern="0" dirty="0">
+                <a:solidFill>
+                  <a:srgbClr val="8FA3B0"/>
+                </a:solidFill>
+                <a:latin typeface="Arial" pitchFamily="34" charset="0"/>
+                <a:ea typeface="Arial" pitchFamily="34" charset="-122"/>
+                <a:cs typeface="Arial" pitchFamily="34" charset="-120"/>
+              </a:rPr>
+              <a:t>LOGO</a:t>
+            </a:r>
+            <a:endParaRPr lang="en-US" sz="1200" dirty="0"/>
+          </a:p>
+        </p:txBody>
+      </p:sp>
+      <p:sp>
+        <p:nvSpPr>
+          <p:cNvPr id="6" name="Shape 4"/>
+          <p:cNvSpPr/>
+          <p:nvPr/>
+        </p:nvSpPr>
+        <p:spPr>
+          <a:xfrm>
             <a:off x="566928" y="685800"/>
             <a:ext cx="1188720" cy="1188720"/>
           </a:xfrm>
@@ -13235,7 +14915,7 @@
       </p:sp>
       <p:pic>
         <p:nvPicPr>
-          <p:cNvPr id="4" name="Image 0" descr="preencoded.png">    </p:cNvPr>
+          <p:cNvPr id="7" name="Image 0" descr="preencoded.png">    </p:cNvPr>
           <p:cNvPicPr>
             <a:picLocks noChangeAspect="1"/>
           </p:cNvPicPr>
@@ -13259,7 +14939,7 @@
       </p:pic>
       <p:sp>
         <p:nvSpPr>
-          <p:cNvPr id="5" name="Text 2"/>
+          <p:cNvPr id="8" name="Text 5"/>
           <p:cNvSpPr txBox="1"/>
           <p:nvPr/>
         </p:nvSpPr>
@@ -13298,7 +14978,7 @@
       </p:sp>
       <p:sp>
         <p:nvSpPr>
-          <p:cNvPr id="6" name="Shape 3"/>
+          <p:cNvPr id="9" name="Shape 6"/>
           <p:cNvSpPr/>
           <p:nvPr/>
         </p:nvSpPr>
@@ -13318,7 +14998,7 @@
       </p:sp>
       <p:sp>
         <p:nvSpPr>
-          <p:cNvPr id="7" name="Text 4"/>
+          <p:cNvPr id="10" name="Text 7"/>
           <p:cNvSpPr txBox="1"/>
           <p:nvPr/>
         </p:nvSpPr>
@@ -13357,7 +15037,7 @@
       </p:sp>
       <p:sp>
         <p:nvSpPr>
-          <p:cNvPr id="8" name="Text 5"/>
+          <p:cNvPr id="11" name="Text 8"/>
           <p:cNvSpPr txBox="1"/>
           <p:nvPr/>
         </p:nvSpPr>
@@ -13396,7 +15076,7 @@
       </p:sp>
       <p:sp>
         <p:nvSpPr>
-          <p:cNvPr id="9" name="Shape 6"/>
+          <p:cNvPr id="12" name="Shape 9"/>
           <p:cNvSpPr/>
           <p:nvPr/>
         </p:nvSpPr>
@@ -13416,7 +15096,7 @@
       </p:sp>
       <p:sp>
         <p:nvSpPr>
-          <p:cNvPr id="10" name="Text 7"/>
+          <p:cNvPr id="13" name="Text 10"/>
           <p:cNvSpPr txBox="1"/>
           <p:nvPr/>
         </p:nvSpPr>
@@ -13455,7 +15135,7 @@
       </p:sp>
       <p:sp>
         <p:nvSpPr>
-          <p:cNvPr id="11" name="Text 8"/>
+          <p:cNvPr id="14" name="Text 11"/>
           <p:cNvSpPr txBox="1"/>
           <p:nvPr/>
         </p:nvSpPr>
@@ -13494,7 +15174,7 @@
       </p:sp>
       <p:sp>
         <p:nvSpPr>
-          <p:cNvPr id="12" name="Shape 9"/>
+          <p:cNvPr id="15" name="Shape 12"/>
           <p:cNvSpPr/>
           <p:nvPr/>
         </p:nvSpPr>
@@ -13514,7 +15194,7 @@
       </p:sp>
       <p:sp>
         <p:nvSpPr>
-          <p:cNvPr id="13" name="Text 10"/>
+          <p:cNvPr id="16" name="Text 13"/>
           <p:cNvSpPr txBox="1"/>
           <p:nvPr/>
         </p:nvSpPr>
@@ -13553,7 +15233,7 @@
       </p:sp>
       <p:sp>
         <p:nvSpPr>
-          <p:cNvPr id="14" name="Text 11"/>
+          <p:cNvPr id="17" name="Text 14"/>
           <p:cNvSpPr txBox="1"/>
           <p:nvPr/>
         </p:nvSpPr>
@@ -13728,6 +15408,90 @@
         </p:nvSpPr>
         <p:spPr>
           <a:xfrm>
+            <a:off x="9619488" y="182880"/>
+            <a:ext cx="2011680" cy="859536"/>
+          </a:xfrm>
+          <a:prstGeom prst="rect">
+            <a:avLst/>
+          </a:prstGeom>
+          <a:solidFill>
+            <a:srgbClr val="FFFFFF"/>
+          </a:solidFill>
+          <a:ln/>
+        </p:spPr>
+      </p:sp>
+      <p:sp>
+        <p:nvSpPr>
+          <p:cNvPr id="6" name="Shape 4"/>
+          <p:cNvSpPr/>
+          <p:nvPr/>
+        </p:nvSpPr>
+        <p:spPr>
+          <a:xfrm>
+            <a:off x="9710928" y="274320"/>
+            <a:ext cx="1828800" cy="676656"/>
+          </a:xfrm>
+          <a:prstGeom prst="rect">
+            <a:avLst/>
+          </a:prstGeom>
+          <a:solidFill>
+            <a:srgbClr val="F1F4F6"/>
+          </a:solidFill>
+          <a:ln w="12700">
+            <a:solidFill>
+              <a:srgbClr val="B6C6D0"/>
+            </a:solidFill>
+            <a:prstDash val="dash"/>
+          </a:ln>
+        </p:spPr>
+      </p:sp>
+      <p:sp>
+        <p:nvSpPr>
+          <p:cNvPr id="7" name="Text 5"/>
+          <p:cNvSpPr txBox="1"/>
+          <p:nvPr/>
+        </p:nvSpPr>
+        <p:spPr>
+          <a:xfrm>
+            <a:off x="9710928" y="274320"/>
+            <a:ext cx="1828800" cy="676656"/>
+          </a:xfrm>
+          <a:prstGeom prst="rect">
+            <a:avLst/>
+          </a:prstGeom>
+          <a:noFill/>
+          <a:ln/>
+        </p:spPr>
+        <p:txBody>
+          <a:bodyPr wrap="square" lIns="0" tIns="0" rIns="0" bIns="0" rtlCol="0" anchor="ctr"/>
+          <a:lstStyle/>
+          <a:p>
+            <a:pPr algn="ctr" indent="0" marL="0">
+              <a:buNone/>
+            </a:pPr>
+            <a:r>
+              <a:rPr lang="en-US" sz="1200" b="1" spc="200" kern="0" dirty="0">
+                <a:solidFill>
+                  <a:srgbClr val="8FA3B0"/>
+                </a:solidFill>
+                <a:latin typeface="Arial" pitchFamily="34" charset="0"/>
+                <a:ea typeface="Arial" pitchFamily="34" charset="-122"/>
+                <a:cs typeface="Arial" pitchFamily="34" charset="-120"/>
+              </a:rPr>
+              <a:t>LOGO</a:t>
+            </a:r>
+            <a:endParaRPr lang="en-US" sz="1200" dirty="0"/>
+          </a:p>
+        </p:txBody>
+      </p:sp>
+      <p:sp>
+        <p:nvSpPr>
+          <p:cNvPr id="8" name="Shape 6"/>
+          <p:cNvSpPr/>
+          <p:nvPr/>
+        </p:nvSpPr>
+        <p:spPr>
+          <a:xfrm>
             <a:off x="9646920" y="1143000"/>
             <a:ext cx="1920240" cy="1920240"/>
           </a:xfrm>
@@ -13742,7 +15506,7 @@
       </p:sp>
       <p:pic>
         <p:nvPicPr>
-          <p:cNvPr id="6" name="Image 0" descr="preencoded.png">    </p:cNvPr>
+          <p:cNvPr id="9" name="Image 0" descr="preencoded.png">    </p:cNvPr>
           <p:cNvPicPr>
             <a:picLocks noChangeAspect="1"/>
           </p:cNvPicPr>
@@ -13766,7 +15530,7 @@
       </p:pic>
       <p:sp>
         <p:nvSpPr>
-          <p:cNvPr id="7" name="Text 4"/>
+          <p:cNvPr id="10" name="Text 7"/>
           <p:cNvSpPr txBox="1"/>
           <p:nvPr/>
         </p:nvSpPr>
@@ -13808,7 +15572,7 @@
       </p:sp>
       <p:sp>
         <p:nvSpPr>
-          <p:cNvPr id="8" name="Text 5"/>
+          <p:cNvPr id="11" name="Text 8"/>
           <p:cNvSpPr txBox="1"/>
           <p:nvPr/>
         </p:nvSpPr>
@@ -13870,7 +15634,7 @@
       </p:sp>
       <p:sp>
         <p:nvSpPr>
-          <p:cNvPr id="9" name="Shape 6"/>
+          <p:cNvPr id="12" name="Shape 9"/>
           <p:cNvSpPr/>
           <p:nvPr/>
         </p:nvSpPr>
@@ -13890,7 +15654,7 @@
       </p:sp>
       <p:sp>
         <p:nvSpPr>
-          <p:cNvPr id="10" name="Shape 7"/>
+          <p:cNvPr id="13" name="Shape 10"/>
           <p:cNvSpPr/>
           <p:nvPr/>
         </p:nvSpPr>
@@ -13910,7 +15674,7 @@
       </p:sp>
       <p:sp>
         <p:nvSpPr>
-          <p:cNvPr id="11" name="Text 8"/>
+          <p:cNvPr id="14" name="Text 11"/>
           <p:cNvSpPr txBox="1"/>
           <p:nvPr/>
         </p:nvSpPr>
@@ -13949,7 +15713,7 @@
       </p:sp>
       <p:sp>
         <p:nvSpPr>
-          <p:cNvPr id="12" name="Shape 9"/>
+          <p:cNvPr id="15" name="Shape 12"/>
           <p:cNvSpPr/>
           <p:nvPr/>
         </p:nvSpPr>
@@ -13969,7 +15733,7 @@
       </p:sp>
       <p:sp>
         <p:nvSpPr>
-          <p:cNvPr id="13" name="Shape 10"/>
+          <p:cNvPr id="16" name="Shape 13"/>
           <p:cNvSpPr/>
           <p:nvPr/>
         </p:nvSpPr>
@@ -13989,7 +15753,7 @@
       </p:sp>
       <p:sp>
         <p:nvSpPr>
-          <p:cNvPr id="14" name="Text 11"/>
+          <p:cNvPr id="17" name="Text 14"/>
           <p:cNvSpPr txBox="1"/>
           <p:nvPr/>
         </p:nvSpPr>
@@ -14028,7 +15792,7 @@
       </p:sp>
       <p:sp>
         <p:nvSpPr>
-          <p:cNvPr id="15" name="Shape 12"/>
+          <p:cNvPr id="18" name="Shape 15"/>
           <p:cNvSpPr/>
           <p:nvPr/>
         </p:nvSpPr>
@@ -14048,7 +15812,7 @@
       </p:sp>
       <p:sp>
         <p:nvSpPr>
-          <p:cNvPr id="16" name="Shape 13"/>
+          <p:cNvPr id="19" name="Shape 16"/>
           <p:cNvSpPr/>
           <p:nvPr/>
         </p:nvSpPr>
@@ -14068,7 +15832,7 @@
       </p:sp>
       <p:sp>
         <p:nvSpPr>
-          <p:cNvPr id="17" name="Text 14"/>
+          <p:cNvPr id="20" name="Text 17"/>
           <p:cNvSpPr txBox="1"/>
           <p:nvPr/>
         </p:nvSpPr>
@@ -14107,7 +15871,7 @@
       </p:sp>
       <p:sp>
         <p:nvSpPr>
-          <p:cNvPr id="18" name="Shape 15"/>
+          <p:cNvPr id="21" name="Shape 18"/>
           <p:cNvSpPr/>
           <p:nvPr/>
         </p:nvSpPr>
@@ -14127,7 +15891,7 @@
       </p:sp>
       <p:sp>
         <p:nvSpPr>
-          <p:cNvPr id="19" name="Shape 16"/>
+          <p:cNvPr id="22" name="Shape 19"/>
           <p:cNvSpPr/>
           <p:nvPr/>
         </p:nvSpPr>
@@ -14147,7 +15911,7 @@
       </p:sp>
       <p:sp>
         <p:nvSpPr>
-          <p:cNvPr id="20" name="Text 17"/>
+          <p:cNvPr id="23" name="Text 20"/>
           <p:cNvSpPr txBox="1"/>
           <p:nvPr/>
         </p:nvSpPr>
@@ -14257,7 +16021,91 @@
       </p:sp>
       <p:sp>
         <p:nvSpPr>
-          <p:cNvPr id="3" name="Text 1"/>
+          <p:cNvPr id="3" name="Shape 1"/>
+          <p:cNvSpPr/>
+          <p:nvPr/>
+        </p:nvSpPr>
+        <p:spPr>
+          <a:xfrm>
+            <a:off x="9619488" y="182880"/>
+            <a:ext cx="2011680" cy="859536"/>
+          </a:xfrm>
+          <a:prstGeom prst="rect">
+            <a:avLst/>
+          </a:prstGeom>
+          <a:solidFill>
+            <a:srgbClr val="FFFFFF"/>
+          </a:solidFill>
+          <a:ln/>
+        </p:spPr>
+      </p:sp>
+      <p:sp>
+        <p:nvSpPr>
+          <p:cNvPr id="4" name="Shape 2"/>
+          <p:cNvSpPr/>
+          <p:nvPr/>
+        </p:nvSpPr>
+        <p:spPr>
+          <a:xfrm>
+            <a:off x="9710928" y="274320"/>
+            <a:ext cx="1828800" cy="676656"/>
+          </a:xfrm>
+          <a:prstGeom prst="rect">
+            <a:avLst/>
+          </a:prstGeom>
+          <a:solidFill>
+            <a:srgbClr val="F1F4F6"/>
+          </a:solidFill>
+          <a:ln w="12700">
+            <a:solidFill>
+              <a:srgbClr val="B6C6D0"/>
+            </a:solidFill>
+            <a:prstDash val="dash"/>
+          </a:ln>
+        </p:spPr>
+      </p:sp>
+      <p:sp>
+        <p:nvSpPr>
+          <p:cNvPr id="5" name="Text 3"/>
+          <p:cNvSpPr txBox="1"/>
+          <p:nvPr/>
+        </p:nvSpPr>
+        <p:spPr>
+          <a:xfrm>
+            <a:off x="9710928" y="274320"/>
+            <a:ext cx="1828800" cy="676656"/>
+          </a:xfrm>
+          <a:prstGeom prst="rect">
+            <a:avLst/>
+          </a:prstGeom>
+          <a:noFill/>
+          <a:ln/>
+        </p:spPr>
+        <p:txBody>
+          <a:bodyPr wrap="square" lIns="0" tIns="0" rIns="0" bIns="0" rtlCol="0" anchor="ctr"/>
+          <a:lstStyle/>
+          <a:p>
+            <a:pPr algn="ctr" indent="0" marL="0">
+              <a:buNone/>
+            </a:pPr>
+            <a:r>
+              <a:rPr lang="en-US" sz="1200" b="1" spc="200" kern="0" dirty="0">
+                <a:solidFill>
+                  <a:srgbClr val="8FA3B0"/>
+                </a:solidFill>
+                <a:latin typeface="Arial" pitchFamily="34" charset="0"/>
+                <a:ea typeface="Arial" pitchFamily="34" charset="-122"/>
+                <a:cs typeface="Arial" pitchFamily="34" charset="-120"/>
+              </a:rPr>
+              <a:t>LOGO</a:t>
+            </a:r>
+            <a:endParaRPr lang="en-US" sz="1200" dirty="0"/>
+          </a:p>
+        </p:txBody>
+      </p:sp>
+      <p:sp>
+        <p:nvSpPr>
+          <p:cNvPr id="6" name="Text 4"/>
           <p:cNvSpPr txBox="1"/>
           <p:nvPr/>
         </p:nvSpPr>
@@ -14296,7 +16144,7 @@
       </p:sp>
       <p:sp>
         <p:nvSpPr>
-          <p:cNvPr id="4" name="Shape 2"/>
+          <p:cNvPr id="7" name="Shape 5"/>
           <p:cNvSpPr/>
           <p:nvPr/>
         </p:nvSpPr>
@@ -14316,7 +16164,7 @@
       </p:sp>
       <p:pic>
         <p:nvPicPr>
-          <p:cNvPr id="5" name="Image 0" descr="preencoded.png">    </p:cNvPr>
+          <p:cNvPr id="8" name="Image 0" descr="preencoded.png">    </p:cNvPr>
           <p:cNvPicPr>
             <a:picLocks noChangeAspect="1"/>
           </p:cNvPicPr>
@@ -14340,7 +16188,7 @@
       </p:pic>
       <p:sp>
         <p:nvSpPr>
-          <p:cNvPr id="6" name="Text 3"/>
+          <p:cNvPr id="9" name="Text 6"/>
           <p:cNvSpPr txBox="1"/>
           <p:nvPr/>
         </p:nvSpPr>
@@ -14379,7 +16227,7 @@
       </p:sp>
       <p:sp>
         <p:nvSpPr>
-          <p:cNvPr id="7" name="Text 4"/>
+          <p:cNvPr id="10" name="Text 7"/>
           <p:cNvSpPr txBox="1"/>
           <p:nvPr/>
         </p:nvSpPr>
@@ -14554,6 +16402,90 @@
         </p:nvSpPr>
         <p:spPr>
           <a:xfrm>
+            <a:off x="9619488" y="182880"/>
+            <a:ext cx="2011680" cy="859536"/>
+          </a:xfrm>
+          <a:prstGeom prst="rect">
+            <a:avLst/>
+          </a:prstGeom>
+          <a:solidFill>
+            <a:srgbClr val="FFFFFF"/>
+          </a:solidFill>
+          <a:ln/>
+        </p:spPr>
+      </p:sp>
+      <p:sp>
+        <p:nvSpPr>
+          <p:cNvPr id="6" name="Shape 4"/>
+          <p:cNvSpPr/>
+          <p:nvPr/>
+        </p:nvSpPr>
+        <p:spPr>
+          <a:xfrm>
+            <a:off x="9710928" y="274320"/>
+            <a:ext cx="1828800" cy="676656"/>
+          </a:xfrm>
+          <a:prstGeom prst="rect">
+            <a:avLst/>
+          </a:prstGeom>
+          <a:solidFill>
+            <a:srgbClr val="F1F4F6"/>
+          </a:solidFill>
+          <a:ln w="12700">
+            <a:solidFill>
+              <a:srgbClr val="B6C6D0"/>
+            </a:solidFill>
+            <a:prstDash val="dash"/>
+          </a:ln>
+        </p:spPr>
+      </p:sp>
+      <p:sp>
+        <p:nvSpPr>
+          <p:cNvPr id="7" name="Text 5"/>
+          <p:cNvSpPr txBox="1"/>
+          <p:nvPr/>
+        </p:nvSpPr>
+        <p:spPr>
+          <a:xfrm>
+            <a:off x="9710928" y="274320"/>
+            <a:ext cx="1828800" cy="676656"/>
+          </a:xfrm>
+          <a:prstGeom prst="rect">
+            <a:avLst/>
+          </a:prstGeom>
+          <a:noFill/>
+          <a:ln/>
+        </p:spPr>
+        <p:txBody>
+          <a:bodyPr wrap="square" lIns="0" tIns="0" rIns="0" bIns="0" rtlCol="0" anchor="ctr"/>
+          <a:lstStyle/>
+          <a:p>
+            <a:pPr algn="ctr" indent="0" marL="0">
+              <a:buNone/>
+            </a:pPr>
+            <a:r>
+              <a:rPr lang="en-US" sz="1200" b="1" spc="200" kern="0" dirty="0">
+                <a:solidFill>
+                  <a:srgbClr val="8FA3B0"/>
+                </a:solidFill>
+                <a:latin typeface="Arial" pitchFamily="34" charset="0"/>
+                <a:ea typeface="Arial" pitchFamily="34" charset="-122"/>
+                <a:cs typeface="Arial" pitchFamily="34" charset="-120"/>
+              </a:rPr>
+              <a:t>LOGO</a:t>
+            </a:r>
+            <a:endParaRPr lang="en-US" sz="1200" dirty="0"/>
+          </a:p>
+        </p:txBody>
+      </p:sp>
+      <p:sp>
+        <p:nvSpPr>
+          <p:cNvPr id="8" name="Shape 6"/>
+          <p:cNvSpPr/>
+          <p:nvPr/>
+        </p:nvSpPr>
+        <p:spPr>
+          <a:xfrm>
             <a:off x="9646920" y="1143000"/>
             <a:ext cx="1920240" cy="1920240"/>
           </a:xfrm>
@@ -14568,7 +16500,7 @@
       </p:sp>
       <p:pic>
         <p:nvPicPr>
-          <p:cNvPr id="6" name="Image 0" descr="preencoded.png">    </p:cNvPr>
+          <p:cNvPr id="9" name="Image 0" descr="preencoded.png">    </p:cNvPr>
           <p:cNvPicPr>
             <a:picLocks noChangeAspect="1"/>
           </p:cNvPicPr>
@@ -14592,7 +16524,7 @@
       </p:pic>
       <p:sp>
         <p:nvSpPr>
-          <p:cNvPr id="7" name="Text 4"/>
+          <p:cNvPr id="10" name="Text 7"/>
           <p:cNvSpPr txBox="1"/>
           <p:nvPr/>
         </p:nvSpPr>
@@ -14654,7 +16586,7 @@
       </p:sp>
       <p:sp>
         <p:nvSpPr>
-          <p:cNvPr id="8" name="Text 5"/>
+          <p:cNvPr id="11" name="Text 8"/>
           <p:cNvSpPr txBox="1"/>
           <p:nvPr/>
         </p:nvSpPr>
@@ -14852,6 +16784,90 @@
         </p:nvSpPr>
         <p:spPr>
           <a:xfrm>
+            <a:off x="9619488" y="182880"/>
+            <a:ext cx="2011680" cy="859536"/>
+          </a:xfrm>
+          <a:prstGeom prst="rect">
+            <a:avLst/>
+          </a:prstGeom>
+          <a:solidFill>
+            <a:srgbClr val="FFFFFF"/>
+          </a:solidFill>
+          <a:ln/>
+        </p:spPr>
+      </p:sp>
+      <p:sp>
+        <p:nvSpPr>
+          <p:cNvPr id="6" name="Shape 4"/>
+          <p:cNvSpPr/>
+          <p:nvPr/>
+        </p:nvSpPr>
+        <p:spPr>
+          <a:xfrm>
+            <a:off x="9710928" y="274320"/>
+            <a:ext cx="1828800" cy="676656"/>
+          </a:xfrm>
+          <a:prstGeom prst="rect">
+            <a:avLst/>
+          </a:prstGeom>
+          <a:solidFill>
+            <a:srgbClr val="F1F4F6"/>
+          </a:solidFill>
+          <a:ln w="12700">
+            <a:solidFill>
+              <a:srgbClr val="B6C6D0"/>
+            </a:solidFill>
+            <a:prstDash val="dash"/>
+          </a:ln>
+        </p:spPr>
+      </p:sp>
+      <p:sp>
+        <p:nvSpPr>
+          <p:cNvPr id="7" name="Text 5"/>
+          <p:cNvSpPr txBox="1"/>
+          <p:nvPr/>
+        </p:nvSpPr>
+        <p:spPr>
+          <a:xfrm>
+            <a:off x="9710928" y="274320"/>
+            <a:ext cx="1828800" cy="676656"/>
+          </a:xfrm>
+          <a:prstGeom prst="rect">
+            <a:avLst/>
+          </a:prstGeom>
+          <a:noFill/>
+          <a:ln/>
+        </p:spPr>
+        <p:txBody>
+          <a:bodyPr wrap="square" lIns="0" tIns="0" rIns="0" bIns="0" rtlCol="0" anchor="ctr"/>
+          <a:lstStyle/>
+          <a:p>
+            <a:pPr algn="ctr" indent="0" marL="0">
+              <a:buNone/>
+            </a:pPr>
+            <a:r>
+              <a:rPr lang="en-US" sz="1200" b="1" spc="200" kern="0" dirty="0">
+                <a:solidFill>
+                  <a:srgbClr val="8FA3B0"/>
+                </a:solidFill>
+                <a:latin typeface="Arial" pitchFamily="34" charset="0"/>
+                <a:ea typeface="Arial" pitchFamily="34" charset="-122"/>
+                <a:cs typeface="Arial" pitchFamily="34" charset="-120"/>
+              </a:rPr>
+              <a:t>LOGO</a:t>
+            </a:r>
+            <a:endParaRPr lang="en-US" sz="1200" dirty="0"/>
+          </a:p>
+        </p:txBody>
+      </p:sp>
+      <p:sp>
+        <p:nvSpPr>
+          <p:cNvPr id="8" name="Shape 6"/>
+          <p:cNvSpPr/>
+          <p:nvPr/>
+        </p:nvSpPr>
+        <p:spPr>
+          <a:xfrm>
             <a:off x="9646920" y="1143000"/>
             <a:ext cx="1920240" cy="1920240"/>
           </a:xfrm>
@@ -14866,7 +16882,7 @@
       </p:sp>
       <p:pic>
         <p:nvPicPr>
-          <p:cNvPr id="6" name="Image 0" descr="preencoded.png">    </p:cNvPr>
+          <p:cNvPr id="9" name="Image 0" descr="preencoded.png">    </p:cNvPr>
           <p:cNvPicPr>
             <a:picLocks noChangeAspect="1"/>
           </p:cNvPicPr>
@@ -14890,7 +16906,7 @@
       </p:pic>
       <p:sp>
         <p:nvSpPr>
-          <p:cNvPr id="7" name="Text 4"/>
+          <p:cNvPr id="10" name="Text 7"/>
           <p:cNvSpPr txBox="1"/>
           <p:nvPr/>
         </p:nvSpPr>
@@ -14952,7 +16968,7 @@
       </p:sp>
       <p:sp>
         <p:nvSpPr>
-          <p:cNvPr id="8" name="Text 5"/>
+          <p:cNvPr id="11" name="Text 8"/>
           <p:cNvSpPr txBox="1"/>
           <p:nvPr/>
         </p:nvSpPr>
@@ -15091,6 +17107,90 @@
         </p:nvSpPr>
         <p:spPr>
           <a:xfrm>
+            <a:off x="9619488" y="182880"/>
+            <a:ext cx="2011680" cy="859536"/>
+          </a:xfrm>
+          <a:prstGeom prst="rect">
+            <a:avLst/>
+          </a:prstGeom>
+          <a:solidFill>
+            <a:srgbClr val="FFFFFF"/>
+          </a:solidFill>
+          <a:ln/>
+        </p:spPr>
+      </p:sp>
+      <p:sp>
+        <p:nvSpPr>
+          <p:cNvPr id="4" name="Shape 2"/>
+          <p:cNvSpPr/>
+          <p:nvPr/>
+        </p:nvSpPr>
+        <p:spPr>
+          <a:xfrm>
+            <a:off x="9710928" y="274320"/>
+            <a:ext cx="1828800" cy="676656"/>
+          </a:xfrm>
+          <a:prstGeom prst="rect">
+            <a:avLst/>
+          </a:prstGeom>
+          <a:solidFill>
+            <a:srgbClr val="F1F4F6"/>
+          </a:solidFill>
+          <a:ln w="12700">
+            <a:solidFill>
+              <a:srgbClr val="B6C6D0"/>
+            </a:solidFill>
+            <a:prstDash val="dash"/>
+          </a:ln>
+        </p:spPr>
+      </p:sp>
+      <p:sp>
+        <p:nvSpPr>
+          <p:cNvPr id="5" name="Text 3"/>
+          <p:cNvSpPr txBox="1"/>
+          <p:nvPr/>
+        </p:nvSpPr>
+        <p:spPr>
+          <a:xfrm>
+            <a:off x="9710928" y="274320"/>
+            <a:ext cx="1828800" cy="676656"/>
+          </a:xfrm>
+          <a:prstGeom prst="rect">
+            <a:avLst/>
+          </a:prstGeom>
+          <a:noFill/>
+          <a:ln/>
+        </p:spPr>
+        <p:txBody>
+          <a:bodyPr wrap="square" lIns="0" tIns="0" rIns="0" bIns="0" rtlCol="0" anchor="ctr"/>
+          <a:lstStyle/>
+          <a:p>
+            <a:pPr algn="ctr" indent="0" marL="0">
+              <a:buNone/>
+            </a:pPr>
+            <a:r>
+              <a:rPr lang="en-US" sz="1200" b="1" spc="200" kern="0" dirty="0">
+                <a:solidFill>
+                  <a:srgbClr val="8FA3B0"/>
+                </a:solidFill>
+                <a:latin typeface="Arial" pitchFamily="34" charset="0"/>
+                <a:ea typeface="Arial" pitchFamily="34" charset="-122"/>
+                <a:cs typeface="Arial" pitchFamily="34" charset="-120"/>
+              </a:rPr>
+              <a:t>LOGO</a:t>
+            </a:r>
+            <a:endParaRPr lang="en-US" sz="1200" dirty="0"/>
+          </a:p>
+        </p:txBody>
+      </p:sp>
+      <p:sp>
+        <p:nvSpPr>
+          <p:cNvPr id="6" name="Shape 4"/>
+          <p:cNvSpPr/>
+          <p:nvPr/>
+        </p:nvSpPr>
+        <p:spPr>
+          <a:xfrm>
             <a:off x="566928" y="685800"/>
             <a:ext cx="1188720" cy="1188720"/>
           </a:xfrm>
@@ -15105,7 +17205,7 @@
       </p:sp>
       <p:pic>
         <p:nvPicPr>
-          <p:cNvPr id="4" name="Image 0" descr="preencoded.png">    </p:cNvPr>
+          <p:cNvPr id="7" name="Image 0" descr="preencoded.png">    </p:cNvPr>
           <p:cNvPicPr>
             <a:picLocks noChangeAspect="1"/>
           </p:cNvPicPr>
@@ -15129,7 +17229,7 @@
       </p:pic>
       <p:sp>
         <p:nvSpPr>
-          <p:cNvPr id="5" name="Text 2"/>
+          <p:cNvPr id="8" name="Text 5"/>
           <p:cNvSpPr txBox="1"/>
           <p:nvPr/>
         </p:nvSpPr>
@@ -15168,7 +17268,7 @@
       </p:sp>
       <p:sp>
         <p:nvSpPr>
-          <p:cNvPr id="6" name="Shape 3"/>
+          <p:cNvPr id="9" name="Shape 6"/>
           <p:cNvSpPr/>
           <p:nvPr/>
         </p:nvSpPr>
@@ -15188,7 +17288,7 @@
       </p:sp>
       <p:sp>
         <p:nvSpPr>
-          <p:cNvPr id="7" name="Text 4"/>
+          <p:cNvPr id="10" name="Text 7"/>
           <p:cNvSpPr txBox="1"/>
           <p:nvPr/>
         </p:nvSpPr>
@@ -15227,7 +17327,7 @@
       </p:sp>
       <p:sp>
         <p:nvSpPr>
-          <p:cNvPr id="8" name="Shape 5"/>
+          <p:cNvPr id="11" name="Shape 8"/>
           <p:cNvSpPr/>
           <p:nvPr/>
         </p:nvSpPr>
@@ -15247,7 +17347,7 @@
       </p:sp>
       <p:sp>
         <p:nvSpPr>
-          <p:cNvPr id="9" name="Text 6"/>
+          <p:cNvPr id="12" name="Text 9"/>
           <p:cNvSpPr txBox="1"/>
           <p:nvPr/>
         </p:nvSpPr>
@@ -15286,7 +17386,7 @@
       </p:sp>
       <p:sp>
         <p:nvSpPr>
-          <p:cNvPr id="10" name="Text 7"/>
+          <p:cNvPr id="13" name="Text 10"/>
           <p:cNvSpPr txBox="1"/>
           <p:nvPr/>
         </p:nvSpPr>
@@ -15357,7 +17457,91 @@
       </p:grpSpPr>
       <p:sp>
         <p:nvSpPr>
-          <p:cNvPr id="2" name="Text 0"/>
+          <p:cNvPr id="2" name="Shape 0"/>
+          <p:cNvSpPr/>
+          <p:nvPr/>
+        </p:nvSpPr>
+        <p:spPr>
+          <a:xfrm>
+            <a:off x="9619488" y="182880"/>
+            <a:ext cx="2011680" cy="859536"/>
+          </a:xfrm>
+          <a:prstGeom prst="rect">
+            <a:avLst/>
+          </a:prstGeom>
+          <a:solidFill>
+            <a:srgbClr val="FFFFFF"/>
+          </a:solidFill>
+          <a:ln/>
+        </p:spPr>
+      </p:sp>
+      <p:sp>
+        <p:nvSpPr>
+          <p:cNvPr id="3" name="Shape 1"/>
+          <p:cNvSpPr/>
+          <p:nvPr/>
+        </p:nvSpPr>
+        <p:spPr>
+          <a:xfrm>
+            <a:off x="9710928" y="274320"/>
+            <a:ext cx="1828800" cy="676656"/>
+          </a:xfrm>
+          <a:prstGeom prst="rect">
+            <a:avLst/>
+          </a:prstGeom>
+          <a:solidFill>
+            <a:srgbClr val="F1F4F6"/>
+          </a:solidFill>
+          <a:ln w="12700">
+            <a:solidFill>
+              <a:srgbClr val="B6C6D0"/>
+            </a:solidFill>
+            <a:prstDash val="dash"/>
+          </a:ln>
+        </p:spPr>
+      </p:sp>
+      <p:sp>
+        <p:nvSpPr>
+          <p:cNvPr id="4" name="Text 2"/>
+          <p:cNvSpPr txBox="1"/>
+          <p:nvPr/>
+        </p:nvSpPr>
+        <p:spPr>
+          <a:xfrm>
+            <a:off x="9710928" y="274320"/>
+            <a:ext cx="1828800" cy="676656"/>
+          </a:xfrm>
+          <a:prstGeom prst="rect">
+            <a:avLst/>
+          </a:prstGeom>
+          <a:noFill/>
+          <a:ln/>
+        </p:spPr>
+        <p:txBody>
+          <a:bodyPr wrap="square" lIns="0" tIns="0" rIns="0" bIns="0" rtlCol="0" anchor="ctr"/>
+          <a:lstStyle/>
+          <a:p>
+            <a:pPr algn="ctr" indent="0" marL="0">
+              <a:buNone/>
+            </a:pPr>
+            <a:r>
+              <a:rPr lang="en-US" sz="1200" b="1" spc="200" kern="0" dirty="0">
+                <a:solidFill>
+                  <a:srgbClr val="8FA3B0"/>
+                </a:solidFill>
+                <a:latin typeface="Arial" pitchFamily="34" charset="0"/>
+                <a:ea typeface="Arial" pitchFamily="34" charset="-122"/>
+                <a:cs typeface="Arial" pitchFamily="34" charset="-120"/>
+              </a:rPr>
+              <a:t>LOGO</a:t>
+            </a:r>
+            <a:endParaRPr lang="en-US" sz="1200" dirty="0"/>
+          </a:p>
+        </p:txBody>
+      </p:sp>
+      <p:sp>
+        <p:nvSpPr>
+          <p:cNvPr id="5" name="Text 3"/>
           <p:cNvSpPr txBox="1"/>
           <p:nvPr/>
         </p:nvSpPr>
@@ -15396,7 +17580,7 @@
       </p:sp>
       <p:sp>
         <p:nvSpPr>
-          <p:cNvPr id="3" name="Text 1"/>
+          <p:cNvPr id="6" name="Text 4"/>
           <p:cNvSpPr txBox="1"/>
           <p:nvPr/>
         </p:nvSpPr>
@@ -15458,7 +17642,7 @@
       </p:sp>
       <p:sp>
         <p:nvSpPr>
-          <p:cNvPr id="4" name="Shape 2"/>
+          <p:cNvPr id="7" name="Shape 5"/>
           <p:cNvSpPr/>
           <p:nvPr/>
         </p:nvSpPr>
@@ -15478,7 +17662,7 @@
       </p:sp>
       <p:pic>
         <p:nvPicPr>
-          <p:cNvPr id="5" name="Image 0" descr="preencoded.png">    </p:cNvPr>
+          <p:cNvPr id="8" name="Image 0" descr="preencoded.png">    </p:cNvPr>
           <p:cNvPicPr>
             <a:picLocks noChangeAspect="1"/>
           </p:cNvPicPr>
@@ -15502,7 +17686,7 @@
       </p:pic>
       <p:sp>
         <p:nvSpPr>
-          <p:cNvPr id="6" name="Shape 3"/>
+          <p:cNvPr id="9" name="Shape 6"/>
           <p:cNvSpPr/>
           <p:nvPr/>
         </p:nvSpPr>
@@ -15522,7 +17706,7 @@
       </p:sp>
       <p:sp>
         <p:nvSpPr>
-          <p:cNvPr id="7" name="Text 4"/>
+          <p:cNvPr id="10" name="Text 7"/>
           <p:cNvSpPr txBox="1"/>
           <p:nvPr/>
         </p:nvSpPr>
@@ -15561,7 +17745,7 @@
       </p:sp>
       <p:sp>
         <p:nvSpPr>
-          <p:cNvPr id="8" name="Text 5"/>
+          <p:cNvPr id="11" name="Text 8"/>
           <p:cNvSpPr txBox="1"/>
           <p:nvPr/>
         </p:nvSpPr>
@@ -15736,6 +17920,90 @@
         </p:nvSpPr>
         <p:spPr>
           <a:xfrm>
+            <a:off x="9619488" y="182880"/>
+            <a:ext cx="2011680" cy="859536"/>
+          </a:xfrm>
+          <a:prstGeom prst="rect">
+            <a:avLst/>
+          </a:prstGeom>
+          <a:solidFill>
+            <a:srgbClr val="FFFFFF"/>
+          </a:solidFill>
+          <a:ln/>
+        </p:spPr>
+      </p:sp>
+      <p:sp>
+        <p:nvSpPr>
+          <p:cNvPr id="6" name="Shape 4"/>
+          <p:cNvSpPr/>
+          <p:nvPr/>
+        </p:nvSpPr>
+        <p:spPr>
+          <a:xfrm>
+            <a:off x="9710928" y="274320"/>
+            <a:ext cx="1828800" cy="676656"/>
+          </a:xfrm>
+          <a:prstGeom prst="rect">
+            <a:avLst/>
+          </a:prstGeom>
+          <a:solidFill>
+            <a:srgbClr val="F1F4F6"/>
+          </a:solidFill>
+          <a:ln w="12700">
+            <a:solidFill>
+              <a:srgbClr val="B6C6D0"/>
+            </a:solidFill>
+            <a:prstDash val="dash"/>
+          </a:ln>
+        </p:spPr>
+      </p:sp>
+      <p:sp>
+        <p:nvSpPr>
+          <p:cNvPr id="7" name="Text 5"/>
+          <p:cNvSpPr txBox="1"/>
+          <p:nvPr/>
+        </p:nvSpPr>
+        <p:spPr>
+          <a:xfrm>
+            <a:off x="9710928" y="274320"/>
+            <a:ext cx="1828800" cy="676656"/>
+          </a:xfrm>
+          <a:prstGeom prst="rect">
+            <a:avLst/>
+          </a:prstGeom>
+          <a:noFill/>
+          <a:ln/>
+        </p:spPr>
+        <p:txBody>
+          <a:bodyPr wrap="square" lIns="0" tIns="0" rIns="0" bIns="0" rtlCol="0" anchor="ctr"/>
+          <a:lstStyle/>
+          <a:p>
+            <a:pPr algn="ctr" indent="0" marL="0">
+              <a:buNone/>
+            </a:pPr>
+            <a:r>
+              <a:rPr lang="en-US" sz="1200" b="1" spc="200" kern="0" dirty="0">
+                <a:solidFill>
+                  <a:srgbClr val="8FA3B0"/>
+                </a:solidFill>
+                <a:latin typeface="Arial" pitchFamily="34" charset="0"/>
+                <a:ea typeface="Arial" pitchFamily="34" charset="-122"/>
+                <a:cs typeface="Arial" pitchFamily="34" charset="-120"/>
+              </a:rPr>
+              <a:t>LOGO</a:t>
+            </a:r>
+            <a:endParaRPr lang="en-US" sz="1200" dirty="0"/>
+          </a:p>
+        </p:txBody>
+      </p:sp>
+      <p:sp>
+        <p:nvSpPr>
+          <p:cNvPr id="8" name="Shape 6"/>
+          <p:cNvSpPr/>
+          <p:nvPr/>
+        </p:nvSpPr>
+        <p:spPr>
+          <a:xfrm>
             <a:off x="9646920" y="1143000"/>
             <a:ext cx="1920240" cy="1920240"/>
           </a:xfrm>
@@ -15750,7 +18018,7 @@
       </p:sp>
       <p:pic>
         <p:nvPicPr>
-          <p:cNvPr id="6" name="Image 0" descr="preencoded.png">    </p:cNvPr>
+          <p:cNvPr id="9" name="Image 0" descr="preencoded.png">    </p:cNvPr>
           <p:cNvPicPr>
             <a:picLocks noChangeAspect="1"/>
           </p:cNvPicPr>
@@ -15774,7 +18042,7 @@
       </p:pic>
       <p:sp>
         <p:nvSpPr>
-          <p:cNvPr id="7" name="Text 4"/>
+          <p:cNvPr id="10" name="Text 7"/>
           <p:cNvSpPr txBox="1"/>
           <p:nvPr/>
         </p:nvSpPr>
@@ -15836,7 +18104,7 @@
       </p:sp>
       <p:sp>
         <p:nvSpPr>
-          <p:cNvPr id="8" name="Text 5"/>
+          <p:cNvPr id="11" name="Text 8"/>
           <p:cNvSpPr txBox="1"/>
           <p:nvPr/>
         </p:nvSpPr>
@@ -15975,6 +18243,90 @@
         </p:nvSpPr>
         <p:spPr>
           <a:xfrm>
+            <a:off x="9619488" y="182880"/>
+            <a:ext cx="2011680" cy="859536"/>
+          </a:xfrm>
+          <a:prstGeom prst="rect">
+            <a:avLst/>
+          </a:prstGeom>
+          <a:solidFill>
+            <a:srgbClr val="FFFFFF"/>
+          </a:solidFill>
+          <a:ln/>
+        </p:spPr>
+      </p:sp>
+      <p:sp>
+        <p:nvSpPr>
+          <p:cNvPr id="4" name="Shape 2"/>
+          <p:cNvSpPr/>
+          <p:nvPr/>
+        </p:nvSpPr>
+        <p:spPr>
+          <a:xfrm>
+            <a:off x="9710928" y="274320"/>
+            <a:ext cx="1828800" cy="676656"/>
+          </a:xfrm>
+          <a:prstGeom prst="rect">
+            <a:avLst/>
+          </a:prstGeom>
+          <a:solidFill>
+            <a:srgbClr val="F1F4F6"/>
+          </a:solidFill>
+          <a:ln w="12700">
+            <a:solidFill>
+              <a:srgbClr val="B6C6D0"/>
+            </a:solidFill>
+            <a:prstDash val="dash"/>
+          </a:ln>
+        </p:spPr>
+      </p:sp>
+      <p:sp>
+        <p:nvSpPr>
+          <p:cNvPr id="5" name="Text 3"/>
+          <p:cNvSpPr txBox="1"/>
+          <p:nvPr/>
+        </p:nvSpPr>
+        <p:spPr>
+          <a:xfrm>
+            <a:off x="9710928" y="274320"/>
+            <a:ext cx="1828800" cy="676656"/>
+          </a:xfrm>
+          <a:prstGeom prst="rect">
+            <a:avLst/>
+          </a:prstGeom>
+          <a:noFill/>
+          <a:ln/>
+        </p:spPr>
+        <p:txBody>
+          <a:bodyPr wrap="square" lIns="0" tIns="0" rIns="0" bIns="0" rtlCol="0" anchor="ctr"/>
+          <a:lstStyle/>
+          <a:p>
+            <a:pPr algn="ctr" indent="0" marL="0">
+              <a:buNone/>
+            </a:pPr>
+            <a:r>
+              <a:rPr lang="en-US" sz="1200" b="1" spc="200" kern="0" dirty="0">
+                <a:solidFill>
+                  <a:srgbClr val="8FA3B0"/>
+                </a:solidFill>
+                <a:latin typeface="Arial" pitchFamily="34" charset="0"/>
+                <a:ea typeface="Arial" pitchFamily="34" charset="-122"/>
+                <a:cs typeface="Arial" pitchFamily="34" charset="-120"/>
+              </a:rPr>
+              <a:t>LOGO</a:t>
+            </a:r>
+            <a:endParaRPr lang="en-US" sz="1200" dirty="0"/>
+          </a:p>
+        </p:txBody>
+      </p:sp>
+      <p:sp>
+        <p:nvSpPr>
+          <p:cNvPr id="6" name="Shape 4"/>
+          <p:cNvSpPr/>
+          <p:nvPr/>
+        </p:nvSpPr>
+        <p:spPr>
+          <a:xfrm>
             <a:off x="0" y="2148840"/>
             <a:ext cx="731520" cy="2514600"/>
           </a:xfrm>
@@ -15989,7 +18341,7 @@
       </p:sp>
       <p:sp>
         <p:nvSpPr>
-          <p:cNvPr id="4" name="Text 2"/>
+          <p:cNvPr id="7" name="Text 5"/>
           <p:cNvSpPr txBox="1"/>
           <p:nvPr/>
         </p:nvSpPr>
@@ -16028,7 +18380,7 @@
       </p:sp>
       <p:sp>
         <p:nvSpPr>
-          <p:cNvPr id="5" name="Text 3"/>
+          <p:cNvPr id="8" name="Text 6"/>
           <p:cNvSpPr txBox="1"/>
           <p:nvPr/>
         </p:nvSpPr>
@@ -16084,7 +18436,7 @@
       </p:sp>
       <p:sp>
         <p:nvSpPr>
-          <p:cNvPr id="6" name="Text 4"/>
+          <p:cNvPr id="9" name="Text 7"/>
           <p:cNvSpPr txBox="1"/>
           <p:nvPr/>
         </p:nvSpPr>
@@ -16123,7 +18475,7 @@
       </p:sp>
       <p:sp>
         <p:nvSpPr>
-          <p:cNvPr id="7" name="Shape 5"/>
+          <p:cNvPr id="10" name="Shape 8"/>
           <p:cNvSpPr/>
           <p:nvPr/>
         </p:nvSpPr>
@@ -16143,7 +18495,7 @@
       </p:sp>
       <p:pic>
         <p:nvPicPr>
-          <p:cNvPr id="8" name="Image 0" descr="preencoded.png">    </p:cNvPr>
+          <p:cNvPr id="11" name="Image 0" descr="preencoded.png">    </p:cNvPr>
           <p:cNvPicPr>
             <a:picLocks noChangeAspect="1"/>
           </p:cNvPicPr>
@@ -16244,6 +18596,90 @@
         </p:nvSpPr>
         <p:spPr>
           <a:xfrm>
+            <a:off x="9619488" y="182880"/>
+            <a:ext cx="2011680" cy="859536"/>
+          </a:xfrm>
+          <a:prstGeom prst="rect">
+            <a:avLst/>
+          </a:prstGeom>
+          <a:solidFill>
+            <a:srgbClr val="FFFFFF"/>
+          </a:solidFill>
+          <a:ln/>
+        </p:spPr>
+      </p:sp>
+      <p:sp>
+        <p:nvSpPr>
+          <p:cNvPr id="4" name="Shape 2"/>
+          <p:cNvSpPr/>
+          <p:nvPr/>
+        </p:nvSpPr>
+        <p:spPr>
+          <a:xfrm>
+            <a:off x="9710928" y="274320"/>
+            <a:ext cx="1828800" cy="676656"/>
+          </a:xfrm>
+          <a:prstGeom prst="rect">
+            <a:avLst/>
+          </a:prstGeom>
+          <a:solidFill>
+            <a:srgbClr val="F1F4F6"/>
+          </a:solidFill>
+          <a:ln w="12700">
+            <a:solidFill>
+              <a:srgbClr val="B6C6D0"/>
+            </a:solidFill>
+            <a:prstDash val="dash"/>
+          </a:ln>
+        </p:spPr>
+      </p:sp>
+      <p:sp>
+        <p:nvSpPr>
+          <p:cNvPr id="5" name="Text 3"/>
+          <p:cNvSpPr txBox="1"/>
+          <p:nvPr/>
+        </p:nvSpPr>
+        <p:spPr>
+          <a:xfrm>
+            <a:off x="9710928" y="274320"/>
+            <a:ext cx="1828800" cy="676656"/>
+          </a:xfrm>
+          <a:prstGeom prst="rect">
+            <a:avLst/>
+          </a:prstGeom>
+          <a:noFill/>
+          <a:ln/>
+        </p:spPr>
+        <p:txBody>
+          <a:bodyPr wrap="square" lIns="0" tIns="0" rIns="0" bIns="0" rtlCol="0" anchor="ctr"/>
+          <a:lstStyle/>
+          <a:p>
+            <a:pPr algn="ctr" indent="0" marL="0">
+              <a:buNone/>
+            </a:pPr>
+            <a:r>
+              <a:rPr lang="en-US" sz="1200" b="1" spc="200" kern="0" dirty="0">
+                <a:solidFill>
+                  <a:srgbClr val="8FA3B0"/>
+                </a:solidFill>
+                <a:latin typeface="Arial" pitchFamily="34" charset="0"/>
+                <a:ea typeface="Arial" pitchFamily="34" charset="-122"/>
+                <a:cs typeface="Arial" pitchFamily="34" charset="-120"/>
+              </a:rPr>
+              <a:t>LOGO</a:t>
+            </a:r>
+            <a:endParaRPr lang="en-US" sz="1200" dirty="0"/>
+          </a:p>
+        </p:txBody>
+      </p:sp>
+      <p:sp>
+        <p:nvSpPr>
+          <p:cNvPr id="6" name="Shape 4"/>
+          <p:cNvSpPr/>
+          <p:nvPr/>
+        </p:nvSpPr>
+        <p:spPr>
+          <a:xfrm>
             <a:off x="566928" y="685800"/>
             <a:ext cx="1188720" cy="1188720"/>
           </a:xfrm>
@@ -16258,7 +18694,7 @@
       </p:sp>
       <p:pic>
         <p:nvPicPr>
-          <p:cNvPr id="4" name="Image 0" descr="preencoded.png">    </p:cNvPr>
+          <p:cNvPr id="7" name="Image 0" descr="preencoded.png">    </p:cNvPr>
           <p:cNvPicPr>
             <a:picLocks noChangeAspect="1"/>
           </p:cNvPicPr>
@@ -16282,7 +18718,7 @@
       </p:pic>
       <p:sp>
         <p:nvSpPr>
-          <p:cNvPr id="5" name="Text 2"/>
+          <p:cNvPr id="8" name="Text 5"/>
           <p:cNvSpPr txBox="1"/>
           <p:nvPr/>
         </p:nvSpPr>
@@ -16321,7 +18757,7 @@
       </p:sp>
       <p:sp>
         <p:nvSpPr>
-          <p:cNvPr id="6" name="Shape 3"/>
+          <p:cNvPr id="9" name="Shape 6"/>
           <p:cNvSpPr/>
           <p:nvPr/>
         </p:nvSpPr>
@@ -16341,7 +18777,7 @@
       </p:sp>
       <p:pic>
         <p:nvPicPr>
-          <p:cNvPr id="7" name="Image 1" descr="preencoded.png">    </p:cNvPr>
+          <p:cNvPr id="10" name="Image 1" descr="preencoded.png">    </p:cNvPr>
           <p:cNvPicPr>
             <a:picLocks noChangeAspect="1"/>
           </p:cNvPicPr>
@@ -16365,7 +18801,7 @@
       </p:pic>
       <p:sp>
         <p:nvSpPr>
-          <p:cNvPr id="8" name="Text 4"/>
+          <p:cNvPr id="11" name="Text 7"/>
           <p:cNvSpPr txBox="1"/>
           <p:nvPr/>
         </p:nvSpPr>
@@ -16404,7 +18840,7 @@
       </p:sp>
       <p:sp>
         <p:nvSpPr>
-          <p:cNvPr id="9" name="Shape 5"/>
+          <p:cNvPr id="12" name="Shape 8"/>
           <p:cNvSpPr/>
           <p:nvPr/>
         </p:nvSpPr>
@@ -16424,7 +18860,7 @@
       </p:sp>
       <p:pic>
         <p:nvPicPr>
-          <p:cNvPr id="10" name="Image 2" descr="preencoded.png">    </p:cNvPr>
+          <p:cNvPr id="13" name="Image 2" descr="preencoded.png">    </p:cNvPr>
           <p:cNvPicPr>
             <a:picLocks noChangeAspect="1"/>
           </p:cNvPicPr>
@@ -16448,7 +18884,7 @@
       </p:pic>
       <p:sp>
         <p:nvSpPr>
-          <p:cNvPr id="11" name="Text 6"/>
+          <p:cNvPr id="14" name="Text 9"/>
           <p:cNvSpPr txBox="1"/>
           <p:nvPr/>
         </p:nvSpPr>
@@ -16487,7 +18923,7 @@
       </p:sp>
       <p:sp>
         <p:nvSpPr>
-          <p:cNvPr id="12" name="Shape 7"/>
+          <p:cNvPr id="15" name="Shape 10"/>
           <p:cNvSpPr/>
           <p:nvPr/>
         </p:nvSpPr>
@@ -16507,7 +18943,7 @@
       </p:sp>
       <p:pic>
         <p:nvPicPr>
-          <p:cNvPr id="13" name="Image 3" descr="preencoded.png">    </p:cNvPr>
+          <p:cNvPr id="16" name="Image 3" descr="preencoded.png">    </p:cNvPr>
           <p:cNvPicPr>
             <a:picLocks noChangeAspect="1"/>
           </p:cNvPicPr>
@@ -16531,7 +18967,7 @@
       </p:pic>
       <p:sp>
         <p:nvSpPr>
-          <p:cNvPr id="14" name="Text 8"/>
+          <p:cNvPr id="17" name="Text 11"/>
           <p:cNvSpPr txBox="1"/>
           <p:nvPr/>
         </p:nvSpPr>
@@ -16570,7 +19006,7 @@
       </p:sp>
       <p:sp>
         <p:nvSpPr>
-          <p:cNvPr id="15" name="Shape 9"/>
+          <p:cNvPr id="18" name="Shape 12"/>
           <p:cNvSpPr/>
           <p:nvPr/>
         </p:nvSpPr>
@@ -16590,7 +19026,7 @@
       </p:sp>
       <p:pic>
         <p:nvPicPr>
-          <p:cNvPr id="16" name="Image 4" descr="preencoded.png">    </p:cNvPr>
+          <p:cNvPr id="19" name="Image 4" descr="preencoded.png">    </p:cNvPr>
           <p:cNvPicPr>
             <a:picLocks noChangeAspect="1"/>
           </p:cNvPicPr>
@@ -16614,7 +19050,7 @@
       </p:pic>
       <p:sp>
         <p:nvSpPr>
-          <p:cNvPr id="17" name="Text 10"/>
+          <p:cNvPr id="20" name="Text 13"/>
           <p:cNvSpPr txBox="1"/>
           <p:nvPr/>
         </p:nvSpPr>
@@ -16653,7 +19089,7 @@
       </p:sp>
       <p:sp>
         <p:nvSpPr>
-          <p:cNvPr id="18" name="Shape 11"/>
+          <p:cNvPr id="21" name="Shape 14"/>
           <p:cNvSpPr/>
           <p:nvPr/>
         </p:nvSpPr>
@@ -16673,7 +19109,7 @@
       </p:sp>
       <p:pic>
         <p:nvPicPr>
-          <p:cNvPr id="19" name="Image 5" descr="preencoded.png">    </p:cNvPr>
+          <p:cNvPr id="22" name="Image 5" descr="preencoded.png">    </p:cNvPr>
           <p:cNvPicPr>
             <a:picLocks noChangeAspect="1"/>
           </p:cNvPicPr>
@@ -16697,7 +19133,7 @@
       </p:pic>
       <p:sp>
         <p:nvSpPr>
-          <p:cNvPr id="20" name="Text 12"/>
+          <p:cNvPr id="23" name="Text 15"/>
           <p:cNvSpPr txBox="1"/>
           <p:nvPr/>
         </p:nvSpPr>
@@ -16807,7 +19243,91 @@
       </p:sp>
       <p:sp>
         <p:nvSpPr>
-          <p:cNvPr id="3" name="Text 1"/>
+          <p:cNvPr id="3" name="Shape 1"/>
+          <p:cNvSpPr/>
+          <p:nvPr/>
+        </p:nvSpPr>
+        <p:spPr>
+          <a:xfrm>
+            <a:off x="9619488" y="182880"/>
+            <a:ext cx="2011680" cy="859536"/>
+          </a:xfrm>
+          <a:prstGeom prst="rect">
+            <a:avLst/>
+          </a:prstGeom>
+          <a:solidFill>
+            <a:srgbClr val="FFFFFF"/>
+          </a:solidFill>
+          <a:ln/>
+        </p:spPr>
+      </p:sp>
+      <p:sp>
+        <p:nvSpPr>
+          <p:cNvPr id="4" name="Shape 2"/>
+          <p:cNvSpPr/>
+          <p:nvPr/>
+        </p:nvSpPr>
+        <p:spPr>
+          <a:xfrm>
+            <a:off x="9710928" y="274320"/>
+            <a:ext cx="1828800" cy="676656"/>
+          </a:xfrm>
+          <a:prstGeom prst="rect">
+            <a:avLst/>
+          </a:prstGeom>
+          <a:solidFill>
+            <a:srgbClr val="F1F4F6"/>
+          </a:solidFill>
+          <a:ln w="12700">
+            <a:solidFill>
+              <a:srgbClr val="B6C6D0"/>
+            </a:solidFill>
+            <a:prstDash val="dash"/>
+          </a:ln>
+        </p:spPr>
+      </p:sp>
+      <p:sp>
+        <p:nvSpPr>
+          <p:cNvPr id="5" name="Text 3"/>
+          <p:cNvSpPr txBox="1"/>
+          <p:nvPr/>
+        </p:nvSpPr>
+        <p:spPr>
+          <a:xfrm>
+            <a:off x="9710928" y="274320"/>
+            <a:ext cx="1828800" cy="676656"/>
+          </a:xfrm>
+          <a:prstGeom prst="rect">
+            <a:avLst/>
+          </a:prstGeom>
+          <a:noFill/>
+          <a:ln/>
+        </p:spPr>
+        <p:txBody>
+          <a:bodyPr wrap="square" lIns="0" tIns="0" rIns="0" bIns="0" rtlCol="0" anchor="ctr"/>
+          <a:lstStyle/>
+          <a:p>
+            <a:pPr algn="ctr" indent="0" marL="0">
+              <a:buNone/>
+            </a:pPr>
+            <a:r>
+              <a:rPr lang="en-US" sz="1200" b="1" spc="200" kern="0" dirty="0">
+                <a:solidFill>
+                  <a:srgbClr val="8FA3B0"/>
+                </a:solidFill>
+                <a:latin typeface="Arial" pitchFamily="34" charset="0"/>
+                <a:ea typeface="Arial" pitchFamily="34" charset="-122"/>
+                <a:cs typeface="Arial" pitchFamily="34" charset="-120"/>
+              </a:rPr>
+              <a:t>LOGO</a:t>
+            </a:r>
+            <a:endParaRPr lang="en-US" sz="1200" dirty="0"/>
+          </a:p>
+        </p:txBody>
+      </p:sp>
+      <p:sp>
+        <p:nvSpPr>
+          <p:cNvPr id="6" name="Text 4"/>
           <p:cNvSpPr txBox="1"/>
           <p:nvPr/>
         </p:nvSpPr>
@@ -16846,7 +19366,7 @@
       </p:sp>
       <p:sp>
         <p:nvSpPr>
-          <p:cNvPr id="4" name="Shape 2"/>
+          <p:cNvPr id="7" name="Shape 5"/>
           <p:cNvSpPr/>
           <p:nvPr/>
         </p:nvSpPr>
@@ -16866,7 +19386,7 @@
       </p:sp>
       <p:pic>
         <p:nvPicPr>
-          <p:cNvPr id="5" name="Image 0" descr="preencoded.png">    </p:cNvPr>
+          <p:cNvPr id="8" name="Image 0" descr="preencoded.png">    </p:cNvPr>
           <p:cNvPicPr>
             <a:picLocks noChangeAspect="1"/>
           </p:cNvPicPr>
@@ -16890,7 +19410,7 @@
       </p:pic>
       <p:sp>
         <p:nvSpPr>
-          <p:cNvPr id="6" name="Text 3"/>
+          <p:cNvPr id="9" name="Text 6"/>
           <p:cNvSpPr txBox="1"/>
           <p:nvPr/>
         </p:nvSpPr>
@@ -16932,7 +19452,7 @@
       </p:sp>
       <p:sp>
         <p:nvSpPr>
-          <p:cNvPr id="7" name="Text 4"/>
+          <p:cNvPr id="10" name="Text 7"/>
           <p:cNvSpPr txBox="1"/>
           <p:nvPr/>
         </p:nvSpPr>
@@ -17065,7 +19585,91 @@
       </p:sp>
       <p:sp>
         <p:nvSpPr>
-          <p:cNvPr id="3" name="Text 1"/>
+          <p:cNvPr id="3" name="Shape 1"/>
+          <p:cNvSpPr/>
+          <p:nvPr/>
+        </p:nvSpPr>
+        <p:spPr>
+          <a:xfrm>
+            <a:off x="9619488" y="182880"/>
+            <a:ext cx="2011680" cy="859536"/>
+          </a:xfrm>
+          <a:prstGeom prst="rect">
+            <a:avLst/>
+          </a:prstGeom>
+          <a:solidFill>
+            <a:srgbClr val="FFFFFF"/>
+          </a:solidFill>
+          <a:ln/>
+        </p:spPr>
+      </p:sp>
+      <p:sp>
+        <p:nvSpPr>
+          <p:cNvPr id="4" name="Shape 2"/>
+          <p:cNvSpPr/>
+          <p:nvPr/>
+        </p:nvSpPr>
+        <p:spPr>
+          <a:xfrm>
+            <a:off x="9710928" y="274320"/>
+            <a:ext cx="1828800" cy="676656"/>
+          </a:xfrm>
+          <a:prstGeom prst="rect">
+            <a:avLst/>
+          </a:prstGeom>
+          <a:solidFill>
+            <a:srgbClr val="F1F4F6"/>
+          </a:solidFill>
+          <a:ln w="12700">
+            <a:solidFill>
+              <a:srgbClr val="B6C6D0"/>
+            </a:solidFill>
+            <a:prstDash val="dash"/>
+          </a:ln>
+        </p:spPr>
+      </p:sp>
+      <p:sp>
+        <p:nvSpPr>
+          <p:cNvPr id="5" name="Text 3"/>
+          <p:cNvSpPr txBox="1"/>
+          <p:nvPr/>
+        </p:nvSpPr>
+        <p:spPr>
+          <a:xfrm>
+            <a:off x="9710928" y="274320"/>
+            <a:ext cx="1828800" cy="676656"/>
+          </a:xfrm>
+          <a:prstGeom prst="rect">
+            <a:avLst/>
+          </a:prstGeom>
+          <a:noFill/>
+          <a:ln/>
+        </p:spPr>
+        <p:txBody>
+          <a:bodyPr wrap="square" lIns="0" tIns="0" rIns="0" bIns="0" rtlCol="0" anchor="ctr"/>
+          <a:lstStyle/>
+          <a:p>
+            <a:pPr algn="ctr" indent="0" marL="0">
+              <a:buNone/>
+            </a:pPr>
+            <a:r>
+              <a:rPr lang="en-US" sz="1200" b="1" spc="200" kern="0" dirty="0">
+                <a:solidFill>
+                  <a:srgbClr val="8FA3B0"/>
+                </a:solidFill>
+                <a:latin typeface="Arial" pitchFamily="34" charset="0"/>
+                <a:ea typeface="Arial" pitchFamily="34" charset="-122"/>
+                <a:cs typeface="Arial" pitchFamily="34" charset="-120"/>
+              </a:rPr>
+              <a:t>LOGO</a:t>
+            </a:r>
+            <a:endParaRPr lang="en-US" sz="1200" dirty="0"/>
+          </a:p>
+        </p:txBody>
+      </p:sp>
+      <p:sp>
+        <p:nvSpPr>
+          <p:cNvPr id="6" name="Text 4"/>
           <p:cNvSpPr txBox="1"/>
           <p:nvPr/>
         </p:nvSpPr>
@@ -17104,7 +19708,7 @@
       </p:sp>
       <p:sp>
         <p:nvSpPr>
-          <p:cNvPr id="4" name="Shape 2"/>
+          <p:cNvPr id="7" name="Shape 5"/>
           <p:cNvSpPr/>
           <p:nvPr/>
         </p:nvSpPr>
@@ -17124,7 +19728,7 @@
       </p:sp>
       <p:pic>
         <p:nvPicPr>
-          <p:cNvPr id="5" name="Image 0" descr="preencoded.png">    </p:cNvPr>
+          <p:cNvPr id="8" name="Image 0" descr="preencoded.png">    </p:cNvPr>
           <p:cNvPicPr>
             <a:picLocks noChangeAspect="1"/>
           </p:cNvPicPr>
@@ -17148,7 +19752,7 @@
       </p:pic>
       <p:sp>
         <p:nvSpPr>
-          <p:cNvPr id="6" name="Text 3"/>
+          <p:cNvPr id="9" name="Text 6"/>
           <p:cNvSpPr txBox="1"/>
           <p:nvPr/>
         </p:nvSpPr>
@@ -17210,7 +19814,7 @@
       </p:sp>
       <p:sp>
         <p:nvSpPr>
-          <p:cNvPr id="7" name="Text 4"/>
+          <p:cNvPr id="10" name="Text 7"/>
           <p:cNvSpPr txBox="1"/>
           <p:nvPr/>
         </p:nvSpPr>
@@ -17343,7 +19947,91 @@
       </p:sp>
       <p:sp>
         <p:nvSpPr>
-          <p:cNvPr id="3" name="Text 1"/>
+          <p:cNvPr id="3" name="Shape 1"/>
+          <p:cNvSpPr/>
+          <p:nvPr/>
+        </p:nvSpPr>
+        <p:spPr>
+          <a:xfrm>
+            <a:off x="9619488" y="182880"/>
+            <a:ext cx="2011680" cy="859536"/>
+          </a:xfrm>
+          <a:prstGeom prst="rect">
+            <a:avLst/>
+          </a:prstGeom>
+          <a:solidFill>
+            <a:srgbClr val="FFFFFF"/>
+          </a:solidFill>
+          <a:ln/>
+        </p:spPr>
+      </p:sp>
+      <p:sp>
+        <p:nvSpPr>
+          <p:cNvPr id="4" name="Shape 2"/>
+          <p:cNvSpPr/>
+          <p:nvPr/>
+        </p:nvSpPr>
+        <p:spPr>
+          <a:xfrm>
+            <a:off x="9710928" y="274320"/>
+            <a:ext cx="1828800" cy="676656"/>
+          </a:xfrm>
+          <a:prstGeom prst="rect">
+            <a:avLst/>
+          </a:prstGeom>
+          <a:solidFill>
+            <a:srgbClr val="F1F4F6"/>
+          </a:solidFill>
+          <a:ln w="12700">
+            <a:solidFill>
+              <a:srgbClr val="B6C6D0"/>
+            </a:solidFill>
+            <a:prstDash val="dash"/>
+          </a:ln>
+        </p:spPr>
+      </p:sp>
+      <p:sp>
+        <p:nvSpPr>
+          <p:cNvPr id="5" name="Text 3"/>
+          <p:cNvSpPr txBox="1"/>
+          <p:nvPr/>
+        </p:nvSpPr>
+        <p:spPr>
+          <a:xfrm>
+            <a:off x="9710928" y="274320"/>
+            <a:ext cx="1828800" cy="676656"/>
+          </a:xfrm>
+          <a:prstGeom prst="rect">
+            <a:avLst/>
+          </a:prstGeom>
+          <a:noFill/>
+          <a:ln/>
+        </p:spPr>
+        <p:txBody>
+          <a:bodyPr wrap="square" lIns="0" tIns="0" rIns="0" bIns="0" rtlCol="0" anchor="ctr"/>
+          <a:lstStyle/>
+          <a:p>
+            <a:pPr algn="ctr" indent="0" marL="0">
+              <a:buNone/>
+            </a:pPr>
+            <a:r>
+              <a:rPr lang="en-US" sz="1200" b="1" spc="200" kern="0" dirty="0">
+                <a:solidFill>
+                  <a:srgbClr val="8FA3B0"/>
+                </a:solidFill>
+                <a:latin typeface="Arial" pitchFamily="34" charset="0"/>
+                <a:ea typeface="Arial" pitchFamily="34" charset="-122"/>
+                <a:cs typeface="Arial" pitchFamily="34" charset="-120"/>
+              </a:rPr>
+              <a:t>LOGO</a:t>
+            </a:r>
+            <a:endParaRPr lang="en-US" sz="1200" dirty="0"/>
+          </a:p>
+        </p:txBody>
+      </p:sp>
+      <p:sp>
+        <p:nvSpPr>
+          <p:cNvPr id="6" name="Text 4"/>
           <p:cNvSpPr txBox="1"/>
           <p:nvPr/>
         </p:nvSpPr>
@@ -17382,7 +20070,7 @@
       </p:sp>
       <p:sp>
         <p:nvSpPr>
-          <p:cNvPr id="4" name="Shape 2"/>
+          <p:cNvPr id="7" name="Shape 5"/>
           <p:cNvSpPr/>
           <p:nvPr/>
         </p:nvSpPr>
@@ -17402,7 +20090,7 @@
       </p:sp>
       <p:pic>
         <p:nvPicPr>
-          <p:cNvPr id="5" name="Image 0" descr="preencoded.png">    </p:cNvPr>
+          <p:cNvPr id="8" name="Image 0" descr="preencoded.png">    </p:cNvPr>
           <p:cNvPicPr>
             <a:picLocks noChangeAspect="1"/>
           </p:cNvPicPr>
@@ -17426,7 +20114,7 @@
       </p:pic>
       <p:sp>
         <p:nvSpPr>
-          <p:cNvPr id="6" name="Text 3"/>
+          <p:cNvPr id="9" name="Text 6"/>
           <p:cNvSpPr txBox="1"/>
           <p:nvPr/>
         </p:nvSpPr>
@@ -17488,7 +20176,7 @@
       </p:sp>
       <p:sp>
         <p:nvSpPr>
-          <p:cNvPr id="7" name="Text 4"/>
+          <p:cNvPr id="10" name="Text 7"/>
           <p:cNvSpPr txBox="1"/>
           <p:nvPr/>
         </p:nvSpPr>

--- a/docs/proyectos/personas-mayores/PPT_Sesion_5_COMBINADA.pptx
+++ b/docs/proyectos/personas-mayores/PPT_Sesion_5_COMBINADA.pptx
@@ -3642,8 +3642,8 @@
         </p:nvSpPr>
         <p:spPr>
           <a:xfrm>
-            <a:off x="9619488" y="182880"/>
-            <a:ext cx="2011680" cy="859536"/>
+            <a:off x="8394192" y="256032"/>
+            <a:ext cx="3227832" cy="1355598"/>
           </a:xfrm>
           <a:prstGeom prst="rect">
             <a:avLst/>
@@ -3662,8 +3662,8 @@
         </p:nvSpPr>
         <p:spPr>
           <a:xfrm>
-            <a:off x="9710928" y="274320"/>
-            <a:ext cx="1828800" cy="676656"/>
+            <a:off x="8522208" y="384048"/>
+            <a:ext cx="2971800" cy="1099566"/>
           </a:xfrm>
           <a:prstGeom prst="rect">
             <a:avLst/>
@@ -3687,8 +3687,8 @@
         </p:nvSpPr>
         <p:spPr>
           <a:xfrm>
-            <a:off x="9710928" y="274320"/>
-            <a:ext cx="1828800" cy="676656"/>
+            <a:off x="8522208" y="384048"/>
+            <a:ext cx="2971800" cy="1099566"/>
           </a:xfrm>
           <a:prstGeom prst="rect">
             <a:avLst/>
@@ -3704,7 +3704,7 @@
               <a:buNone/>
             </a:pPr>
             <a:r>
-              <a:rPr lang="en-US" sz="1200" b="1" spc="200" kern="0" dirty="0">
+              <a:rPr lang="en-US" sz="1500" b="1" spc="200" kern="0" dirty="0">
                 <a:solidFill>
                   <a:srgbClr val="8FA3B0"/>
                 </a:solidFill>
@@ -3714,7 +3714,7 @@
               </a:rPr>
               <a:t>LOGO</a:t>
             </a:r>
-            <a:endParaRPr lang="en-US" sz="1200" dirty="0"/>
+            <a:endParaRPr lang="en-US" sz="1500" dirty="0"/>
           </a:p>
         </p:txBody>
       </p:sp>
@@ -3726,8 +3726,8 @@
         </p:nvSpPr>
         <p:spPr>
           <a:xfrm>
-            <a:off x="4480560" y="274320"/>
-            <a:ext cx="7315200" cy="868680"/>
+            <a:off x="4480560" y="384048"/>
+            <a:ext cx="3840480" cy="749808"/>
           </a:xfrm>
           <a:prstGeom prst="rect">
             <a:avLst/>
@@ -3743,7 +3743,7 @@
               <a:buNone/>
             </a:pPr>
             <a:r>
-              <a:rPr lang="en-US" sz="5800" b="1" dirty="0">
+              <a:rPr lang="en-US" sz="4800" b="1" dirty="0">
                 <a:solidFill>
                   <a:srgbClr val="15455F"/>
                 </a:solidFill>
@@ -3753,7 +3753,7 @@
               </a:rPr>
               <a:t>MEDELLÍN</a:t>
             </a:r>
-            <a:endParaRPr lang="en-US" sz="5800" dirty="0"/>
+            <a:endParaRPr lang="en-US" sz="4800" dirty="0"/>
           </a:p>
         </p:txBody>
       </p:sp>
@@ -3765,8 +3765,8 @@
         </p:nvSpPr>
         <p:spPr>
           <a:xfrm>
-            <a:off x="4480560" y="1005840"/>
-            <a:ext cx="7315200" cy="868680"/>
+            <a:off x="4480560" y="1024128"/>
+            <a:ext cx="3840480" cy="749808"/>
           </a:xfrm>
           <a:prstGeom prst="rect">
             <a:avLst/>
@@ -3782,7 +3782,7 @@
               <a:buNone/>
             </a:pPr>
             <a:r>
-              <a:rPr lang="en-US" sz="5800" b="1" dirty="0">
+              <a:rPr lang="en-US" sz="4800" b="1" dirty="0">
                 <a:solidFill>
                   <a:srgbClr val="15455F"/>
                 </a:solidFill>
@@ -3792,7 +3792,7 @@
               </a:rPr>
               <a:t>TE QUIERE</a:t>
             </a:r>
-            <a:endParaRPr lang="en-US" sz="5800" dirty="0"/>
+            <a:endParaRPr lang="en-US" sz="4800" dirty="0"/>
           </a:p>
         </p:txBody>
       </p:sp>
